--- a/de_presentation.pptx
+++ b/de_presentation.pptx
@@ -6,6 +6,17 @@
   </p:sldMasterIdLst>
   <p:sldIdLst>
     <p:sldId id="256" r:id="rId2"/>
+    <p:sldId id="258" r:id="rId3"/>
+    <p:sldId id="257" r:id="rId4"/>
+    <p:sldId id="259" r:id="rId5"/>
+    <p:sldId id="260" r:id="rId6"/>
+    <p:sldId id="261" r:id="rId7"/>
+    <p:sldId id="262" r:id="rId8"/>
+    <p:sldId id="263" r:id="rId9"/>
+    <p:sldId id="264" r:id="rId10"/>
+    <p:sldId id="265" r:id="rId11"/>
+    <p:sldId id="266" r:id="rId12"/>
+    <p:sldId id="267" r:id="rId13"/>
   </p:sldIdLst>
   <p:sldSz cx="12192000" cy="6858000"/>
   <p:notesSz cx="6858000" cy="9144000"/>
@@ -104,6 +115,11 @@
       </a:defRPr>
     </a:lvl9pPr>
   </p:defaultTextStyle>
+  <p:extLst>
+    <p:ext uri="{EFAFB233-063F-42B5-8137-9DF3F51BA10A}">
+      <p15:sldGuideLst xmlns:p15="http://schemas.microsoft.com/office/powerpoint/2012/main"/>
+    </p:ext>
+  </p:extLst>
 </p:presentation>
 </file>
 
@@ -256,7 +272,7 @@
           <a:p>
             <a:fld id="{D2A20609-F74F-49ED-B263-7189F572A603}" type="datetimeFigureOut">
               <a:rPr lang="en-001" smtClean="0"/>
-              <a:t>28/10/2025</a:t>
+              <a:t>29/10/2025</a:t>
             </a:fld>
             <a:endParaRPr lang="en-001"/>
           </a:p>
@@ -456,7 +472,7 @@
           <a:p>
             <a:fld id="{D2A20609-F74F-49ED-B263-7189F572A603}" type="datetimeFigureOut">
               <a:rPr lang="en-001" smtClean="0"/>
-              <a:t>28/10/2025</a:t>
+              <a:t>29/10/2025</a:t>
             </a:fld>
             <a:endParaRPr lang="en-001"/>
           </a:p>
@@ -666,7 +682,7 @@
           <a:p>
             <a:fld id="{D2A20609-F74F-49ED-B263-7189F572A603}" type="datetimeFigureOut">
               <a:rPr lang="en-001" smtClean="0"/>
-              <a:t>28/10/2025</a:t>
+              <a:t>29/10/2025</a:t>
             </a:fld>
             <a:endParaRPr lang="en-001"/>
           </a:p>
@@ -866,7 +882,7 @@
           <a:p>
             <a:fld id="{D2A20609-F74F-49ED-B263-7189F572A603}" type="datetimeFigureOut">
               <a:rPr lang="en-001" smtClean="0"/>
-              <a:t>28/10/2025</a:t>
+              <a:t>29/10/2025</a:t>
             </a:fld>
             <a:endParaRPr lang="en-001"/>
           </a:p>
@@ -1142,7 +1158,7 @@
           <a:p>
             <a:fld id="{D2A20609-F74F-49ED-B263-7189F572A603}" type="datetimeFigureOut">
               <a:rPr lang="en-001" smtClean="0"/>
-              <a:t>28/10/2025</a:t>
+              <a:t>29/10/2025</a:t>
             </a:fld>
             <a:endParaRPr lang="en-001"/>
           </a:p>
@@ -1410,7 +1426,7 @@
           <a:p>
             <a:fld id="{D2A20609-F74F-49ED-B263-7189F572A603}" type="datetimeFigureOut">
               <a:rPr lang="en-001" smtClean="0"/>
-              <a:t>28/10/2025</a:t>
+              <a:t>29/10/2025</a:t>
             </a:fld>
             <a:endParaRPr lang="en-001"/>
           </a:p>
@@ -1825,7 +1841,7 @@
           <a:p>
             <a:fld id="{D2A20609-F74F-49ED-B263-7189F572A603}" type="datetimeFigureOut">
               <a:rPr lang="en-001" smtClean="0"/>
-              <a:t>28/10/2025</a:t>
+              <a:t>29/10/2025</a:t>
             </a:fld>
             <a:endParaRPr lang="en-001"/>
           </a:p>
@@ -1967,7 +1983,7 @@
           <a:p>
             <a:fld id="{D2A20609-F74F-49ED-B263-7189F572A603}" type="datetimeFigureOut">
               <a:rPr lang="en-001" smtClean="0"/>
-              <a:t>28/10/2025</a:t>
+              <a:t>29/10/2025</a:t>
             </a:fld>
             <a:endParaRPr lang="en-001"/>
           </a:p>
@@ -2080,7 +2096,7 @@
           <a:p>
             <a:fld id="{D2A20609-F74F-49ED-B263-7189F572A603}" type="datetimeFigureOut">
               <a:rPr lang="en-001" smtClean="0"/>
-              <a:t>28/10/2025</a:t>
+              <a:t>29/10/2025</a:t>
             </a:fld>
             <a:endParaRPr lang="en-001"/>
           </a:p>
@@ -2393,7 +2409,7 @@
           <a:p>
             <a:fld id="{D2A20609-F74F-49ED-B263-7189F572A603}" type="datetimeFigureOut">
               <a:rPr lang="en-001" smtClean="0"/>
-              <a:t>28/10/2025</a:t>
+              <a:t>29/10/2025</a:t>
             </a:fld>
             <a:endParaRPr lang="en-001"/>
           </a:p>
@@ -2682,7 +2698,7 @@
           <a:p>
             <a:fld id="{D2A20609-F74F-49ED-B263-7189F572A603}" type="datetimeFigureOut">
               <a:rPr lang="en-001" smtClean="0"/>
-              <a:t>28/10/2025</a:t>
+              <a:t>29/10/2025</a:t>
             </a:fld>
             <a:endParaRPr lang="en-001"/>
           </a:p>
@@ -2925,7 +2941,7 @@
           <a:p>
             <a:fld id="{D2A20609-F74F-49ED-B263-7189F572A603}" type="datetimeFigureOut">
               <a:rPr lang="en-001" smtClean="0"/>
-              <a:t>28/10/2025</a:t>
+              <a:t>29/10/2025</a:t>
             </a:fld>
             <a:endParaRPr lang="en-001"/>
           </a:p>
@@ -3363,7 +3379,19 @@
           <a:bodyPr/>
           <a:lstStyle/>
           <a:p>
-            <a:endParaRPr lang="en-001"/>
+            <a:r>
+              <a:rPr lang="en-US" dirty="0" err="1"/>
+              <a:t>Diferencijalna</a:t>
+            </a:r>
+            <a:r>
+              <a:rPr lang="en-US" dirty="0"/>
+              <a:t> </a:t>
+            </a:r>
+            <a:r>
+              <a:rPr lang="en-US" dirty="0" err="1"/>
+              <a:t>evolucija</a:t>
+            </a:r>
+            <a:endParaRPr lang="en-001" dirty="0"/>
           </a:p>
         </p:txBody>
       </p:sp>
@@ -3388,7 +3416,21 @@
           <a:bodyPr/>
           <a:lstStyle/>
           <a:p>
-            <a:endParaRPr lang="en-001"/>
+            <a:r>
+              <a:rPr lang="en-US" dirty="0"/>
+              <a:t>Milo</a:t>
+            </a:r>
+            <a:r>
+              <a:rPr lang="sr-Latn-RS" dirty="0"/>
+              <a:t>š Đurić 191/2018</a:t>
+            </a:r>
+          </a:p>
+          <a:p>
+            <a:r>
+              <a:rPr lang="sr-Latn-RS" dirty="0"/>
+              <a:t>Matematički fakultet – Univerzitet u Beogradu</a:t>
+            </a:r>
+            <a:endParaRPr lang="en-001" dirty="0"/>
           </a:p>
         </p:txBody>
       </p:sp>
@@ -3396,6 +3438,2889 @@
     <p:extLst>
       <p:ext uri="{BB962C8B-B14F-4D97-AF65-F5344CB8AC3E}">
         <p14:creationId xmlns:p14="http://schemas.microsoft.com/office/powerpoint/2010/main" val="2011096216"/>
+      </p:ext>
+    </p:extLst>
+  </p:cSld>
+  <p:clrMapOvr>
+    <a:masterClrMapping/>
+  </p:clrMapOvr>
+</p:sld>
+</file>
+
+<file path=ppt/slides/slide10.xml><?xml version="1.0" encoding="utf-8"?>
+<p:sld xmlns:a="http://schemas.openxmlformats.org/drawingml/2006/main" xmlns:r="http://schemas.openxmlformats.org/officeDocument/2006/relationships" xmlns:p="http://schemas.openxmlformats.org/presentationml/2006/main">
+  <p:cSld>
+    <p:spTree>
+      <p:nvGrpSpPr>
+        <p:cNvPr id="1" name=""/>
+        <p:cNvGrpSpPr/>
+        <p:nvPr/>
+      </p:nvGrpSpPr>
+      <p:grpSpPr>
+        <a:xfrm>
+          <a:off x="0" y="0"/>
+          <a:ext cx="0" cy="0"/>
+          <a:chOff x="0" y="0"/>
+          <a:chExt cx="0" cy="0"/>
+        </a:xfrm>
+      </p:grpSpPr>
+      <p:sp>
+        <p:nvSpPr>
+          <p:cNvPr id="2" name="Title 1">
+            <a:extLst>
+              <a:ext uri="{FF2B5EF4-FFF2-40B4-BE49-F238E27FC236}">
+                <a16:creationId xmlns:a16="http://schemas.microsoft.com/office/drawing/2014/main" id="{D8178EB6-F673-9082-5BD0-B50DA10ED1F4}"/>
+              </a:ext>
+            </a:extLst>
+          </p:cNvPr>
+          <p:cNvSpPr>
+            <a:spLocks noGrp="1"/>
+          </p:cNvSpPr>
+          <p:nvPr>
+            <p:ph type="title"/>
+          </p:nvPr>
+        </p:nvSpPr>
+        <p:spPr/>
+        <p:txBody>
+          <a:bodyPr/>
+          <a:lstStyle/>
+          <a:p>
+            <a:r>
+              <a:rPr lang="sr-Latn-RS" dirty="0"/>
+              <a:t>Šekelova funkcija: Istorija najboljih ocena</a:t>
+            </a:r>
+            <a:endParaRPr lang="en-001" dirty="0"/>
+          </a:p>
+        </p:txBody>
+      </p:sp>
+      <p:pic>
+        <p:nvPicPr>
+          <p:cNvPr id="5" name="Content Placeholder 4">
+            <a:extLst>
+              <a:ext uri="{FF2B5EF4-FFF2-40B4-BE49-F238E27FC236}">
+                <a16:creationId xmlns:a16="http://schemas.microsoft.com/office/drawing/2014/main" id="{262FE886-1122-61CF-F26D-786DBF568A64}"/>
+              </a:ext>
+            </a:extLst>
+          </p:cNvPr>
+          <p:cNvPicPr>
+            <a:picLocks noGrp="1" noChangeAspect="1"/>
+          </p:cNvPicPr>
+          <p:nvPr>
+            <p:ph idx="1"/>
+          </p:nvPr>
+        </p:nvPicPr>
+        <p:blipFill>
+          <a:blip r:embed="rId2">
+            <a:extLst>
+              <a:ext uri="{28A0092B-C50C-407E-A947-70E740481C1C}">
+                <a14:useLocalDpi xmlns:a14="http://schemas.microsoft.com/office/drawing/2010/main" val="0"/>
+              </a:ext>
+            </a:extLst>
+          </a:blip>
+          <a:stretch>
+            <a:fillRect/>
+          </a:stretch>
+        </p:blipFill>
+        <p:spPr>
+          <a:xfrm>
+            <a:off x="2469885" y="1825625"/>
+            <a:ext cx="7252230" cy="4351338"/>
+          </a:xfrm>
+        </p:spPr>
+      </p:pic>
+    </p:spTree>
+    <p:extLst>
+      <p:ext uri="{BB962C8B-B14F-4D97-AF65-F5344CB8AC3E}">
+        <p14:creationId xmlns:p14="http://schemas.microsoft.com/office/powerpoint/2010/main" val="2720651744"/>
+      </p:ext>
+    </p:extLst>
+  </p:cSld>
+  <p:clrMapOvr>
+    <a:masterClrMapping/>
+  </p:clrMapOvr>
+</p:sld>
+</file>
+
+<file path=ppt/slides/slide11.xml><?xml version="1.0" encoding="utf-8"?>
+<p:sld xmlns:a="http://schemas.openxmlformats.org/drawingml/2006/main" xmlns:r="http://schemas.openxmlformats.org/officeDocument/2006/relationships" xmlns:p="http://schemas.openxmlformats.org/presentationml/2006/main">
+  <p:cSld>
+    <p:spTree>
+      <p:nvGrpSpPr>
+        <p:cNvPr id="1" name=""/>
+        <p:cNvGrpSpPr/>
+        <p:nvPr/>
+      </p:nvGrpSpPr>
+      <p:grpSpPr>
+        <a:xfrm>
+          <a:off x="0" y="0"/>
+          <a:ext cx="0" cy="0"/>
+          <a:chOff x="0" y="0"/>
+          <a:chExt cx="0" cy="0"/>
+        </a:xfrm>
+      </p:grpSpPr>
+      <p:sp>
+        <p:nvSpPr>
+          <p:cNvPr id="2" name="Title 1">
+            <a:extLst>
+              <a:ext uri="{FF2B5EF4-FFF2-40B4-BE49-F238E27FC236}">
+                <a16:creationId xmlns:a16="http://schemas.microsoft.com/office/drawing/2014/main" id="{74CCC2B8-A0C7-BE0E-C068-541B42503691}"/>
+              </a:ext>
+            </a:extLst>
+          </p:cNvPr>
+          <p:cNvSpPr>
+            <a:spLocks noGrp="1"/>
+          </p:cNvSpPr>
+          <p:nvPr>
+            <p:ph type="title"/>
+          </p:nvPr>
+        </p:nvSpPr>
+        <p:spPr/>
+        <p:txBody>
+          <a:bodyPr/>
+          <a:lstStyle/>
+          <a:p>
+            <a:r>
+              <a:rPr lang="sr-Latn-RS" dirty="0"/>
+              <a:t>Šekelova funkcija: Istorija </a:t>
+            </a:r>
+            <a:r>
+              <a:rPr lang="sr-Latn-RS" dirty="0" err="1"/>
+              <a:t>dverziteta</a:t>
+            </a:r>
+            <a:endParaRPr lang="en-001" dirty="0"/>
+          </a:p>
+        </p:txBody>
+      </p:sp>
+      <p:pic>
+        <p:nvPicPr>
+          <p:cNvPr id="5" name="Content Placeholder 4">
+            <a:extLst>
+              <a:ext uri="{FF2B5EF4-FFF2-40B4-BE49-F238E27FC236}">
+                <a16:creationId xmlns:a16="http://schemas.microsoft.com/office/drawing/2014/main" id="{D60DF561-8EBE-B65E-F5E6-627458EF689E}"/>
+              </a:ext>
+            </a:extLst>
+          </p:cNvPr>
+          <p:cNvPicPr>
+            <a:picLocks noGrp="1" noChangeAspect="1"/>
+          </p:cNvPicPr>
+          <p:nvPr>
+            <p:ph idx="1"/>
+          </p:nvPr>
+        </p:nvPicPr>
+        <p:blipFill>
+          <a:blip r:embed="rId2">
+            <a:extLst>
+              <a:ext uri="{28A0092B-C50C-407E-A947-70E740481C1C}">
+                <a14:useLocalDpi xmlns:a14="http://schemas.microsoft.com/office/drawing/2010/main" val="0"/>
+              </a:ext>
+            </a:extLst>
+          </a:blip>
+          <a:stretch>
+            <a:fillRect/>
+          </a:stretch>
+        </p:blipFill>
+        <p:spPr>
+          <a:xfrm>
+            <a:off x="2469885" y="1825625"/>
+            <a:ext cx="7252230" cy="4351338"/>
+          </a:xfrm>
+        </p:spPr>
+      </p:pic>
+    </p:spTree>
+    <p:extLst>
+      <p:ext uri="{BB962C8B-B14F-4D97-AF65-F5344CB8AC3E}">
+        <p14:creationId xmlns:p14="http://schemas.microsoft.com/office/powerpoint/2010/main" val="489436866"/>
+      </p:ext>
+    </p:extLst>
+  </p:cSld>
+  <p:clrMapOvr>
+    <a:masterClrMapping/>
+  </p:clrMapOvr>
+</p:sld>
+</file>
+
+<file path=ppt/slides/slide12.xml><?xml version="1.0" encoding="utf-8"?>
+<p:sld xmlns:a="http://schemas.openxmlformats.org/drawingml/2006/main" xmlns:r="http://schemas.openxmlformats.org/officeDocument/2006/relationships" xmlns:p="http://schemas.openxmlformats.org/presentationml/2006/main">
+  <p:cSld>
+    <p:spTree>
+      <p:nvGrpSpPr>
+        <p:cNvPr id="1" name=""/>
+        <p:cNvGrpSpPr/>
+        <p:nvPr/>
+      </p:nvGrpSpPr>
+      <p:grpSpPr>
+        <a:xfrm>
+          <a:off x="0" y="0"/>
+          <a:ext cx="0" cy="0"/>
+          <a:chOff x="0" y="0"/>
+          <a:chExt cx="0" cy="0"/>
+        </a:xfrm>
+      </p:grpSpPr>
+      <p:sp>
+        <p:nvSpPr>
+          <p:cNvPr id="2" name="Title 1">
+            <a:extLst>
+              <a:ext uri="{FF2B5EF4-FFF2-40B4-BE49-F238E27FC236}">
+                <a16:creationId xmlns:a16="http://schemas.microsoft.com/office/drawing/2014/main" id="{C1D950A4-EDA4-74E4-9845-DD7ACC36DC16}"/>
+              </a:ext>
+            </a:extLst>
+          </p:cNvPr>
+          <p:cNvSpPr>
+            <a:spLocks noGrp="1"/>
+          </p:cNvSpPr>
+          <p:nvPr>
+            <p:ph type="title"/>
+          </p:nvPr>
+        </p:nvSpPr>
+        <p:spPr/>
+        <p:txBody>
+          <a:bodyPr/>
+          <a:lstStyle/>
+          <a:p>
+            <a:r>
+              <a:rPr lang="sr-Latn-RS" dirty="0"/>
+              <a:t>Zaključak</a:t>
+            </a:r>
+            <a:endParaRPr lang="en-001" dirty="0"/>
+          </a:p>
+        </p:txBody>
+      </p:sp>
+      <p:sp>
+        <p:nvSpPr>
+          <p:cNvPr id="3" name="Content Placeholder 2">
+            <a:extLst>
+              <a:ext uri="{FF2B5EF4-FFF2-40B4-BE49-F238E27FC236}">
+                <a16:creationId xmlns:a16="http://schemas.microsoft.com/office/drawing/2014/main" id="{D61E592C-EB50-99CB-42A8-9D76B48BD567}"/>
+              </a:ext>
+            </a:extLst>
+          </p:cNvPr>
+          <p:cNvSpPr>
+            <a:spLocks noGrp="1"/>
+          </p:cNvSpPr>
+          <p:nvPr>
+            <p:ph idx="1"/>
+          </p:nvPr>
+        </p:nvSpPr>
+        <p:spPr/>
+        <p:txBody>
+          <a:bodyPr/>
+          <a:lstStyle/>
+          <a:p>
+            <a:r>
+              <a:rPr lang="sr-Latn-RS" dirty="0"/>
+              <a:t>Diferencijalna evolucija je postigla bolje ili slične rezultate kao algoritmi iz biblioteka </a:t>
+            </a:r>
+            <a:r>
+              <a:rPr lang="sr-Latn-RS" dirty="0" err="1"/>
+              <a:t>scipy.optimize</a:t>
+            </a:r>
+            <a:r>
+              <a:rPr lang="sr-Latn-RS" dirty="0"/>
+              <a:t> i </a:t>
+            </a:r>
+            <a:r>
+              <a:rPr lang="sr-Latn-RS" dirty="0" err="1"/>
+              <a:t>mistic</a:t>
+            </a:r>
+            <a:endParaRPr lang="sr-Latn-RS" dirty="0"/>
+          </a:p>
+          <a:p>
+            <a:r>
+              <a:rPr lang="sr-Latn-RS" dirty="0" err="1"/>
+              <a:t>Samoadaptivni</a:t>
+            </a:r>
+            <a:r>
+              <a:rPr lang="sr-Latn-RS" dirty="0"/>
+              <a:t> algoritmi sporije konvergiraju, ali održavaju veću </a:t>
+            </a:r>
+            <a:r>
+              <a:rPr lang="sr-Latn-RS"/>
+              <a:t>raznolikost populacije</a:t>
+            </a:r>
+            <a:endParaRPr lang="sr-Latn-RS" dirty="0"/>
+          </a:p>
+        </p:txBody>
+      </p:sp>
+    </p:spTree>
+    <p:extLst>
+      <p:ext uri="{BB962C8B-B14F-4D97-AF65-F5344CB8AC3E}">
+        <p14:creationId xmlns:p14="http://schemas.microsoft.com/office/powerpoint/2010/main" val="1023588271"/>
+      </p:ext>
+    </p:extLst>
+  </p:cSld>
+  <p:clrMapOvr>
+    <a:masterClrMapping/>
+  </p:clrMapOvr>
+</p:sld>
+</file>
+
+<file path=ppt/slides/slide2.xml><?xml version="1.0" encoding="utf-8"?>
+<p:sld xmlns:a="http://schemas.openxmlformats.org/drawingml/2006/main" xmlns:r="http://schemas.openxmlformats.org/officeDocument/2006/relationships" xmlns:p="http://schemas.openxmlformats.org/presentationml/2006/main">
+  <p:cSld>
+    <p:spTree>
+      <p:nvGrpSpPr>
+        <p:cNvPr id="1" name=""/>
+        <p:cNvGrpSpPr/>
+        <p:nvPr/>
+      </p:nvGrpSpPr>
+      <p:grpSpPr>
+        <a:xfrm>
+          <a:off x="0" y="0"/>
+          <a:ext cx="0" cy="0"/>
+          <a:chOff x="0" y="0"/>
+          <a:chExt cx="0" cy="0"/>
+        </a:xfrm>
+      </p:grpSpPr>
+      <p:sp>
+        <p:nvSpPr>
+          <p:cNvPr id="2" name="Title 1">
+            <a:extLst>
+              <a:ext uri="{FF2B5EF4-FFF2-40B4-BE49-F238E27FC236}">
+                <a16:creationId xmlns:a16="http://schemas.microsoft.com/office/drawing/2014/main" id="{3CE5728E-8C90-74FF-F4F6-7BD29F935895}"/>
+              </a:ext>
+            </a:extLst>
+          </p:cNvPr>
+          <p:cNvSpPr>
+            <a:spLocks noGrp="1"/>
+          </p:cNvSpPr>
+          <p:nvPr>
+            <p:ph type="title"/>
+          </p:nvPr>
+        </p:nvSpPr>
+        <p:spPr/>
+        <p:txBody>
+          <a:bodyPr/>
+          <a:lstStyle/>
+          <a:p>
+            <a:r>
+              <a:rPr lang="sr-Latn-RS" dirty="0"/>
+              <a:t>Uvod</a:t>
+            </a:r>
+            <a:endParaRPr lang="en-001" dirty="0"/>
+          </a:p>
+        </p:txBody>
+      </p:sp>
+      <p:sp>
+        <p:nvSpPr>
+          <p:cNvPr id="3" name="Content Placeholder 2">
+            <a:extLst>
+              <a:ext uri="{FF2B5EF4-FFF2-40B4-BE49-F238E27FC236}">
+                <a16:creationId xmlns:a16="http://schemas.microsoft.com/office/drawing/2014/main" id="{A2983493-F33D-3199-356C-72F2D66164A3}"/>
+              </a:ext>
+            </a:extLst>
+          </p:cNvPr>
+          <p:cNvSpPr>
+            <a:spLocks noGrp="1"/>
+          </p:cNvSpPr>
+          <p:nvPr>
+            <p:ph idx="1"/>
+          </p:nvPr>
+        </p:nvSpPr>
+        <p:spPr>
+          <a:xfrm>
+            <a:off x="838200" y="1825625"/>
+            <a:ext cx="5090777" cy="4351338"/>
+          </a:xfrm>
+        </p:spPr>
+        <p:txBody>
+          <a:bodyPr/>
+          <a:lstStyle/>
+          <a:p>
+            <a:r>
+              <a:rPr lang="sr-Latn-RS" dirty="0"/>
+              <a:t>Populaciona </a:t>
+            </a:r>
+            <a:r>
+              <a:rPr lang="sr-Latn-RS" dirty="0" err="1"/>
+              <a:t>metaheuristika</a:t>
+            </a:r>
+            <a:endParaRPr lang="sr-Latn-RS" dirty="0"/>
+          </a:p>
+          <a:p>
+            <a:r>
+              <a:rPr lang="sr-Latn-RS" dirty="0"/>
+              <a:t>Objavljena 1995.</a:t>
+            </a:r>
+          </a:p>
+          <a:p>
+            <a:r>
+              <a:rPr lang="sr-Latn-RS" dirty="0"/>
+              <a:t>Koristi se za kontinualnu optimizaciju</a:t>
+            </a:r>
+          </a:p>
+          <a:p>
+            <a:r>
+              <a:rPr lang="sr-Latn-RS" dirty="0"/>
+              <a:t>Ne pretpostavlja </a:t>
+            </a:r>
+            <a:r>
+              <a:rPr lang="sr-Latn-RS" dirty="0" err="1"/>
+              <a:t>diferencijabilnost</a:t>
+            </a:r>
+            <a:r>
+              <a:rPr lang="sr-Latn-RS" dirty="0"/>
+              <a:t>, ni neprekidnost</a:t>
+            </a:r>
+            <a:endParaRPr lang="en-001" dirty="0"/>
+          </a:p>
+        </p:txBody>
+      </p:sp>
+      <p:pic>
+        <p:nvPicPr>
+          <p:cNvPr id="5" name="Content Placeholder 4">
+            <a:extLst>
+              <a:ext uri="{FF2B5EF4-FFF2-40B4-BE49-F238E27FC236}">
+                <a16:creationId xmlns:a16="http://schemas.microsoft.com/office/drawing/2014/main" id="{E5BDC434-F9B1-DB93-0CAB-9CA245F48206}"/>
+              </a:ext>
+            </a:extLst>
+          </p:cNvPr>
+          <p:cNvPicPr>
+            <a:picLocks noChangeAspect="1"/>
+          </p:cNvPicPr>
+          <p:nvPr/>
+        </p:nvPicPr>
+        <p:blipFill>
+          <a:blip r:embed="rId2">
+            <a:extLst>
+              <a:ext uri="{28A0092B-C50C-407E-A947-70E740481C1C}">
+                <a14:useLocalDpi xmlns:a14="http://schemas.microsoft.com/office/drawing/2010/main" val="0"/>
+              </a:ext>
+            </a:extLst>
+          </a:blip>
+          <a:stretch>
+            <a:fillRect/>
+          </a:stretch>
+        </p:blipFill>
+        <p:spPr>
+          <a:xfrm>
+            <a:off x="5928977" y="1825625"/>
+            <a:ext cx="5801784" cy="4351338"/>
+          </a:xfrm>
+          <a:prstGeom prst="rect">
+            <a:avLst/>
+          </a:prstGeom>
+        </p:spPr>
+      </p:pic>
+    </p:spTree>
+    <p:extLst>
+      <p:ext uri="{BB962C8B-B14F-4D97-AF65-F5344CB8AC3E}">
+        <p14:creationId xmlns:p14="http://schemas.microsoft.com/office/powerpoint/2010/main" val="2457574439"/>
+      </p:ext>
+    </p:extLst>
+  </p:cSld>
+  <p:clrMapOvr>
+    <a:masterClrMapping/>
+  </p:clrMapOvr>
+</p:sld>
+</file>
+
+<file path=ppt/slides/slide3.xml><?xml version="1.0" encoding="utf-8"?>
+<p:sld xmlns:a="http://schemas.openxmlformats.org/drawingml/2006/main" xmlns:r="http://schemas.openxmlformats.org/officeDocument/2006/relationships" xmlns:p="http://schemas.openxmlformats.org/presentationml/2006/main">
+  <p:cSld>
+    <p:spTree>
+      <p:nvGrpSpPr>
+        <p:cNvPr id="1" name=""/>
+        <p:cNvGrpSpPr/>
+        <p:nvPr/>
+      </p:nvGrpSpPr>
+      <p:grpSpPr>
+        <a:xfrm>
+          <a:off x="0" y="0"/>
+          <a:ext cx="0" cy="0"/>
+          <a:chOff x="0" y="0"/>
+          <a:chExt cx="0" cy="0"/>
+        </a:xfrm>
+      </p:grpSpPr>
+      <p:sp>
+        <p:nvSpPr>
+          <p:cNvPr id="2" name="Title 1">
+            <a:extLst>
+              <a:ext uri="{FF2B5EF4-FFF2-40B4-BE49-F238E27FC236}">
+                <a16:creationId xmlns:a16="http://schemas.microsoft.com/office/drawing/2014/main" id="{81873935-366D-9354-468D-CA8F468858D6}"/>
+              </a:ext>
+            </a:extLst>
+          </p:cNvPr>
+          <p:cNvSpPr>
+            <a:spLocks noGrp="1"/>
+          </p:cNvSpPr>
+          <p:nvPr>
+            <p:ph type="title"/>
+          </p:nvPr>
+        </p:nvSpPr>
+        <p:spPr/>
+        <p:txBody>
+          <a:bodyPr/>
+          <a:lstStyle/>
+          <a:p>
+            <a:r>
+              <a:rPr lang="sr-Latn-RS" dirty="0"/>
+              <a:t>Algoritam</a:t>
+            </a:r>
+            <a:endParaRPr lang="en-001" dirty="0"/>
+          </a:p>
+        </p:txBody>
+      </p:sp>
+      <p:sp>
+        <p:nvSpPr>
+          <p:cNvPr id="7" name="Content Placeholder 6">
+            <a:extLst>
+              <a:ext uri="{FF2B5EF4-FFF2-40B4-BE49-F238E27FC236}">
+                <a16:creationId xmlns:a16="http://schemas.microsoft.com/office/drawing/2014/main" id="{F188EAB9-899E-FE6E-A87B-C2392F88B00E}"/>
+              </a:ext>
+            </a:extLst>
+          </p:cNvPr>
+          <p:cNvSpPr>
+            <a:spLocks noGrp="1"/>
+          </p:cNvSpPr>
+          <p:nvPr>
+            <p:ph idx="1"/>
+          </p:nvPr>
+        </p:nvSpPr>
+        <p:spPr/>
+        <p:txBody>
+          <a:bodyPr/>
+          <a:lstStyle/>
+          <a:p>
+            <a:r>
+              <a:rPr lang="sr-Latn-RS" dirty="0"/>
+              <a:t>Inicijalizacija</a:t>
+            </a:r>
+            <a:r>
+              <a:rPr lang="en-US" dirty="0"/>
+              <a:t>: </a:t>
+            </a:r>
+            <a:r>
+              <a:rPr lang="sr-Latn-RS" dirty="0"/>
+              <a:t>Generisati populaciju od N jedinki</a:t>
+            </a:r>
+          </a:p>
+          <a:p>
+            <a:r>
+              <a:rPr lang="sr-Latn-RS" dirty="0"/>
+              <a:t>Evaluacija: Oceniti svaku jedinku u populaciji</a:t>
+            </a:r>
+          </a:p>
+          <a:p>
+            <a:r>
+              <a:rPr lang="sr-Latn-RS" dirty="0"/>
+              <a:t>Dok nije ispunjen uslov zaustavljanja ponavljaj</a:t>
+            </a:r>
+          </a:p>
+          <a:p>
+            <a:pPr lvl="1"/>
+            <a:r>
+              <a:rPr lang="sr-Latn-RS" dirty="0"/>
+              <a:t>Selekcija: Izabrati jedinke iz populacije koje će dati nove jedinke</a:t>
+            </a:r>
+          </a:p>
+          <a:p>
+            <a:pPr lvl="1"/>
+            <a:r>
+              <a:rPr lang="sr-Latn-RS" dirty="0"/>
+              <a:t>Varijacija: Primeniti operatore varijacije i napraviti nove jedinke</a:t>
+            </a:r>
+          </a:p>
+          <a:p>
+            <a:pPr lvl="1"/>
+            <a:r>
+              <a:rPr lang="sr-Latn-RS" dirty="0"/>
+              <a:t>Evaluacija: Oceniti jedinke u novoj populaciji</a:t>
+            </a:r>
+          </a:p>
+          <a:p>
+            <a:pPr lvl="1"/>
+            <a:r>
+              <a:rPr lang="sr-Latn-RS" dirty="0"/>
+              <a:t>Preživljavanje: Izabrati jedinke iz nove i tekuće populacije</a:t>
+            </a:r>
+            <a:br>
+              <a:rPr lang="sr-Latn-RS" dirty="0"/>
+            </a:br>
+            <a:r>
+              <a:rPr lang="sr-Latn-RS" dirty="0"/>
+              <a:t>i formirati novu generaciju </a:t>
+            </a:r>
+          </a:p>
+          <a:p>
+            <a:r>
+              <a:rPr lang="sr-Latn-RS" dirty="0"/>
+              <a:t>Kraj rada </a:t>
+            </a:r>
+            <a:r>
+              <a:rPr lang="sr-Latn-RS" dirty="0" err="1"/>
+              <a:t>algortma</a:t>
+            </a:r>
+            <a:endParaRPr lang="en-001" dirty="0"/>
+          </a:p>
+        </p:txBody>
+      </p:sp>
+    </p:spTree>
+    <p:extLst>
+      <p:ext uri="{BB962C8B-B14F-4D97-AF65-F5344CB8AC3E}">
+        <p14:creationId xmlns:p14="http://schemas.microsoft.com/office/powerpoint/2010/main" val="1010798685"/>
+      </p:ext>
+    </p:extLst>
+  </p:cSld>
+  <p:clrMapOvr>
+    <a:masterClrMapping/>
+  </p:clrMapOvr>
+</p:sld>
+</file>
+
+<file path=ppt/slides/slide4.xml><?xml version="1.0" encoding="utf-8"?>
+<p:sld xmlns:a="http://schemas.openxmlformats.org/drawingml/2006/main" xmlns:r="http://schemas.openxmlformats.org/officeDocument/2006/relationships" xmlns:p="http://schemas.openxmlformats.org/presentationml/2006/main">
+  <p:cSld>
+    <p:spTree>
+      <p:nvGrpSpPr>
+        <p:cNvPr id="1" name=""/>
+        <p:cNvGrpSpPr/>
+        <p:nvPr/>
+      </p:nvGrpSpPr>
+      <p:grpSpPr>
+        <a:xfrm>
+          <a:off x="0" y="0"/>
+          <a:ext cx="0" cy="0"/>
+          <a:chOff x="0" y="0"/>
+          <a:chExt cx="0" cy="0"/>
+        </a:xfrm>
+      </p:grpSpPr>
+      <p:sp>
+        <p:nvSpPr>
+          <p:cNvPr id="2" name="Title 1">
+            <a:extLst>
+              <a:ext uri="{FF2B5EF4-FFF2-40B4-BE49-F238E27FC236}">
+                <a16:creationId xmlns:a16="http://schemas.microsoft.com/office/drawing/2014/main" id="{7DB5C1C1-6FD9-691E-17E7-1D4F78F4B057}"/>
+              </a:ext>
+            </a:extLst>
+          </p:cNvPr>
+          <p:cNvSpPr>
+            <a:spLocks noGrp="1"/>
+          </p:cNvSpPr>
+          <p:nvPr>
+            <p:ph type="title"/>
+          </p:nvPr>
+        </p:nvSpPr>
+        <p:spPr/>
+        <p:txBody>
+          <a:bodyPr/>
+          <a:lstStyle/>
+          <a:p>
+            <a:r>
+              <a:rPr lang="sr-Latn-RS" dirty="0"/>
+              <a:t>Konstrukcija jedinke i izbor parametara</a:t>
+            </a:r>
+            <a:endParaRPr lang="en-001" dirty="0"/>
+          </a:p>
+        </p:txBody>
+      </p:sp>
+      <mc:AlternateContent xmlns:mc="http://schemas.openxmlformats.org/markup-compatibility/2006">
+        <mc:Choice xmlns:a14="http://schemas.microsoft.com/office/drawing/2010/main" Requires="a14">
+          <p:sp>
+            <p:nvSpPr>
+              <p:cNvPr id="3" name="Content Placeholder 2">
+                <a:extLst>
+                  <a:ext uri="{FF2B5EF4-FFF2-40B4-BE49-F238E27FC236}">
+                    <a16:creationId xmlns:a16="http://schemas.microsoft.com/office/drawing/2014/main" id="{21A5D1F5-2A37-F14E-C703-01C4327C495B}"/>
+                  </a:ext>
+                </a:extLst>
+              </p:cNvPr>
+              <p:cNvSpPr>
+                <a:spLocks noGrp="1"/>
+              </p:cNvSpPr>
+              <p:nvPr>
+                <p:ph idx="1"/>
+              </p:nvPr>
+            </p:nvSpPr>
+            <p:spPr/>
+            <p:txBody>
+              <a:bodyPr/>
+              <a:lstStyle/>
+              <a:p>
+                <a:r>
+                  <a:rPr lang="sr-Latn-RS" dirty="0"/>
+                  <a:t>Prvobitna verzija diferencijalne evolucije je za slučajne a, b i c generisala nove </a:t>
+                </a:r>
+                <a:r>
+                  <a:rPr lang="sr-Latn-RS" dirty="0" err="1"/>
+                  <a:t>nove</a:t>
+                </a:r>
+                <a:r>
+                  <a:rPr lang="sr-Latn-RS" dirty="0"/>
+                  <a:t> jedinke prema formuli</a:t>
+                </a:r>
+              </a:p>
+              <a:p>
+                <a:pPr marL="0" indent="0">
+                  <a:buNone/>
+                </a:pPr>
+                <a14:m>
+                  <m:oMathPara xmlns:m="http://schemas.openxmlformats.org/officeDocument/2006/math">
+                    <m:oMathParaPr>
+                      <m:jc m:val="centerGroup"/>
+                    </m:oMathParaPr>
+                    <m:oMath xmlns:m="http://schemas.openxmlformats.org/officeDocument/2006/math">
+                      <m:r>
+                        <a:rPr lang="sr-Latn-RS" i="1"/>
+                        <m:t>𝑧</m:t>
+                      </m:r>
+                      <m:r>
+                        <a:rPr lang="sr-Latn-RS" i="1"/>
+                        <m:t>=</m:t>
+                      </m:r>
+                      <m:r>
+                        <a:rPr lang="sr-Latn-RS" i="1"/>
+                        <m:t>𝑎</m:t>
+                      </m:r>
+                      <m:r>
+                        <a:rPr lang="sr-Latn-RS" i="1"/>
+                        <m:t>+ </m:t>
+                      </m:r>
+                      <m:r>
+                        <a:rPr lang="sr-Latn-RS" i="1"/>
+                        <m:t>𝜔</m:t>
+                      </m:r>
+                      <m:r>
+                        <a:rPr lang="sr-Latn-RS" i="1"/>
+                        <m:t>∙</m:t>
+                      </m:r>
+                      <m:d>
+                        <m:dPr>
+                          <m:ctrlPr>
+                            <a:rPr lang="en-001" i="1"/>
+                          </m:ctrlPr>
+                        </m:dPr>
+                        <m:e>
+                          <m:r>
+                            <a:rPr lang="sr-Latn-RS" i="1"/>
+                            <m:t>𝑏</m:t>
+                          </m:r>
+                          <m:r>
+                            <a:rPr lang="sr-Latn-RS" i="1"/>
+                            <m:t>−</m:t>
+                          </m:r>
+                          <m:r>
+                            <a:rPr lang="sr-Latn-RS" i="1"/>
+                            <m:t>𝑐</m:t>
+                          </m:r>
+                        </m:e>
+                      </m:d>
+                    </m:oMath>
+                  </m:oMathPara>
+                </a14:m>
+                <a:endParaRPr lang="en-US" dirty="0"/>
+              </a:p>
+              <a:p>
+                <a:r>
+                  <a:rPr lang="en-US" dirty="0"/>
+                  <a:t>Varija</a:t>
+                </a:r>
+                <a:r>
+                  <a:rPr lang="sr-Latn-RS" dirty="0" err="1"/>
+                  <a:t>cija</a:t>
+                </a:r>
+                <a:r>
+                  <a:rPr lang="sr-Latn-RS" dirty="0"/>
+                  <a:t> između nove jedinke x i stare jedinke z je vršena po hromozomima, gde je j </a:t>
+                </a:r>
+                <a:r>
+                  <a:rPr lang="sr-Latn-RS" dirty="0" err="1"/>
+                  <a:t>sučajan</a:t>
+                </a:r>
+                <a:r>
+                  <a:rPr lang="sr-Latn-RS" dirty="0"/>
+                  <a:t> </a:t>
+                </a:r>
+                <a:r>
+                  <a:rPr lang="sr-Latn-RS" dirty="0" err="1"/>
+                  <a:t>index</a:t>
+                </a:r>
+                <a:r>
+                  <a:rPr lang="sr-Latn-RS" dirty="0"/>
+                  <a:t>, a r slučajna vrednost (0, 1)</a:t>
+                </a:r>
+              </a:p>
+              <a:p>
+                <a:pPr marL="0" indent="0">
+                  <a:buNone/>
+                </a:pPr>
+                <a14:m>
+                  <m:oMathPara xmlns:m="http://schemas.openxmlformats.org/officeDocument/2006/math">
+                    <m:oMathParaPr>
+                      <m:jc m:val="centerGroup"/>
+                    </m:oMathParaPr>
+                    <m:oMath xmlns:m="http://schemas.openxmlformats.org/officeDocument/2006/math">
+                      <m:sSub>
+                        <m:sSubPr>
+                          <m:ctrlPr>
+                            <a:rPr lang="en-001" i="1"/>
+                          </m:ctrlPr>
+                        </m:sSubPr>
+                        <m:e>
+                          <m:r>
+                            <a:rPr lang="sr-Latn-RS" i="1"/>
+                            <m:t>𝑥</m:t>
+                          </m:r>
+                          <m:r>
+                            <a:rPr lang="sr-Latn-RS" i="1"/>
+                            <m:t>′</m:t>
+                          </m:r>
+                        </m:e>
+                        <m:sub>
+                          <m:r>
+                            <a:rPr lang="sr-Latn-RS" i="1"/>
+                            <m:t>𝑖</m:t>
+                          </m:r>
+                        </m:sub>
+                      </m:sSub>
+                      <m:r>
+                        <a:rPr lang="sr-Latn-RS" i="1"/>
+                        <m:t>=</m:t>
+                      </m:r>
+                      <m:d>
+                        <m:dPr>
+                          <m:begChr m:val="{"/>
+                          <m:endChr m:val=""/>
+                          <m:ctrlPr>
+                            <a:rPr lang="en-001" i="1"/>
+                          </m:ctrlPr>
+                        </m:dPr>
+                        <m:e>
+                          <m:eqArr>
+                            <m:eqArrPr>
+                              <m:ctrlPr>
+                                <a:rPr lang="en-001" i="1"/>
+                              </m:ctrlPr>
+                            </m:eqArrPr>
+                            <m:e>
+                              <m:sSub>
+                                <m:sSubPr>
+                                  <m:ctrlPr>
+                                    <a:rPr lang="en-001" i="1"/>
+                                  </m:ctrlPr>
+                                </m:sSubPr>
+                                <m:e>
+                                  <m:r>
+                                    <a:rPr lang="sr-Latn-RS" i="1"/>
+                                    <m:t>𝑧</m:t>
+                                  </m:r>
+                                </m:e>
+                                <m:sub>
+                                  <m:r>
+                                    <a:rPr lang="sr-Latn-RS" i="1"/>
+                                    <m:t>𝑖</m:t>
+                                  </m:r>
+                                </m:sub>
+                              </m:sSub>
+                              <m:r>
+                                <a:rPr lang="sr-Latn-RS" i="1"/>
+                                <m:t>, </m:t>
+                              </m:r>
+                              <m:r>
+                                <a:rPr lang="sr-Latn-RS" i="1"/>
+                                <m:t>𝑎𝑘𝑜</m:t>
+                              </m:r>
+                              <m:r>
+                                <a:rPr lang="sr-Latn-RS" i="1"/>
+                                <m:t> </m:t>
+                              </m:r>
+                              <m:r>
+                                <a:rPr lang="sr-Latn-RS" i="1"/>
+                                <m:t>𝑖</m:t>
+                              </m:r>
+                              <m:r>
+                                <a:rPr lang="sr-Latn-RS" i="1"/>
+                                <m:t>=</m:t>
+                              </m:r>
+                              <m:r>
+                                <a:rPr lang="sr-Latn-RS" i="1"/>
+                                <m:t>𝑗</m:t>
+                              </m:r>
+                              <m:r>
+                                <a:rPr lang="sr-Latn-RS" i="1"/>
+                                <m:t> </m:t>
+                              </m:r>
+                              <m:r>
+                                <a:rPr lang="sr-Latn-RS" i="1"/>
+                                <m:t>𝑖𝑙𝑖</m:t>
+                              </m:r>
+                              <m:r>
+                                <a:rPr lang="sr-Latn-RS" i="1"/>
+                                <m:t> </m:t>
+                              </m:r>
+                              <m:r>
+                                <a:rPr lang="sr-Latn-RS" i="1"/>
+                                <m:t>𝑟</m:t>
+                              </m:r>
+                              <m:r>
+                                <a:rPr lang="sr-Latn-RS" i="1"/>
+                                <m:t>&lt;</m:t>
+                              </m:r>
+                              <m:r>
+                                <a:rPr lang="sr-Latn-RS" i="1"/>
+                                <m:t>𝑝</m:t>
+                              </m:r>
+                            </m:e>
+                            <m:e>
+                              <m:sSub>
+                                <m:sSubPr>
+                                  <m:ctrlPr>
+                                    <a:rPr lang="en-001" i="1"/>
+                                  </m:ctrlPr>
+                                </m:sSubPr>
+                                <m:e>
+                                  <m:r>
+                                    <a:rPr lang="sr-Latn-RS" i="1"/>
+                                    <m:t>𝑥</m:t>
+                                  </m:r>
+                                </m:e>
+                                <m:sub>
+                                  <m:r>
+                                    <a:rPr lang="sr-Latn-RS" i="1"/>
+                                    <m:t>𝑖</m:t>
+                                  </m:r>
+                                </m:sub>
+                              </m:sSub>
+                              <m:r>
+                                <a:rPr lang="sr-Latn-RS" i="1"/>
+                                <m:t>, </m:t>
+                              </m:r>
+                              <m:r>
+                                <a:rPr lang="sr-Latn-RS" i="1"/>
+                                <m:t>𝑖𝑛𝑎</m:t>
+                              </m:r>
+                              <m:r>
+                                <a:rPr lang="sr-Latn-RS" i="1"/>
+                                <m:t>č</m:t>
+                              </m:r>
+                              <m:r>
+                                <a:rPr lang="sr-Latn-RS" i="1"/>
+                                <m:t>𝑒</m:t>
+                              </m:r>
+                            </m:e>
+                          </m:eqArr>
+                        </m:e>
+                      </m:d>
+                    </m:oMath>
+                  </m:oMathPara>
+                </a14:m>
+                <a:endParaRPr lang="sr-Latn-RS" dirty="0"/>
+              </a:p>
+              <a:p>
+                <a:r>
+                  <a:rPr lang="sr-Latn-RS" dirty="0"/>
+                  <a:t>Preporučene vrednosti omega su od 1/</a:t>
+                </a:r>
+                <a:r>
+                  <a:rPr lang="sr-Latn-RS" dirty="0" err="1"/>
+                  <a:t>npop</a:t>
+                </a:r>
+                <a:r>
+                  <a:rPr lang="sr-Latn-RS" dirty="0"/>
+                  <a:t> do 1.2, a za p od 0 do 0.1</a:t>
+                </a:r>
+                <a:endParaRPr lang="en-001" dirty="0"/>
+              </a:p>
+            </p:txBody>
+          </p:sp>
+        </mc:Choice>
+        <mc:Fallback>
+          <p:sp>
+            <p:nvSpPr>
+              <p:cNvPr id="3" name="Content Placeholder 2">
+                <a:extLst>
+                  <a:ext uri="{FF2B5EF4-FFF2-40B4-BE49-F238E27FC236}">
+                    <a16:creationId xmlns:a16="http://schemas.microsoft.com/office/drawing/2014/main" id="{21A5D1F5-2A37-F14E-C703-01C4327C495B}"/>
+                  </a:ext>
+                </a:extLst>
+              </p:cNvPr>
+              <p:cNvSpPr>
+                <a:spLocks noGrp="1" noRot="1" noChangeAspect="1" noMove="1" noResize="1" noEditPoints="1" noAdjustHandles="1" noChangeArrowheads="1" noChangeShapeType="1" noTextEdit="1"/>
+              </p:cNvSpPr>
+              <p:nvPr>
+                <p:ph idx="1"/>
+              </p:nvPr>
+            </p:nvSpPr>
+            <p:spPr>
+              <a:blipFill>
+                <a:blip r:embed="rId2"/>
+                <a:stretch>
+                  <a:fillRect l="-1043" t="-2241" r="-580"/>
+                </a:stretch>
+              </a:blipFill>
+            </p:spPr>
+            <p:txBody>
+              <a:bodyPr/>
+              <a:lstStyle/>
+              <a:p>
+                <a:r>
+                  <a:rPr lang="en-001">
+                    <a:noFill/>
+                  </a:rPr>
+                  <a:t> </a:t>
+                </a:r>
+              </a:p>
+            </p:txBody>
+          </p:sp>
+        </mc:Fallback>
+      </mc:AlternateContent>
+    </p:spTree>
+    <p:extLst>
+      <p:ext uri="{BB962C8B-B14F-4D97-AF65-F5344CB8AC3E}">
+        <p14:creationId xmlns:p14="http://schemas.microsoft.com/office/powerpoint/2010/main" val="4065625573"/>
+      </p:ext>
+    </p:extLst>
+  </p:cSld>
+  <p:clrMapOvr>
+    <a:masterClrMapping/>
+  </p:clrMapOvr>
+</p:sld>
+</file>
+
+<file path=ppt/slides/slide5.xml><?xml version="1.0" encoding="utf-8"?>
+<p:sld xmlns:a="http://schemas.openxmlformats.org/drawingml/2006/main" xmlns:r="http://schemas.openxmlformats.org/officeDocument/2006/relationships" xmlns:p="http://schemas.openxmlformats.org/presentationml/2006/main">
+  <p:cSld>
+    <p:spTree>
+      <p:nvGrpSpPr>
+        <p:cNvPr id="1" name=""/>
+        <p:cNvGrpSpPr/>
+        <p:nvPr/>
+      </p:nvGrpSpPr>
+      <p:grpSpPr>
+        <a:xfrm>
+          <a:off x="0" y="0"/>
+          <a:ext cx="0" cy="0"/>
+          <a:chOff x="0" y="0"/>
+          <a:chExt cx="0" cy="0"/>
+        </a:xfrm>
+      </p:grpSpPr>
+      <p:sp>
+        <p:nvSpPr>
+          <p:cNvPr id="2" name="Title 1">
+            <a:extLst>
+              <a:ext uri="{FF2B5EF4-FFF2-40B4-BE49-F238E27FC236}">
+                <a16:creationId xmlns:a16="http://schemas.microsoft.com/office/drawing/2014/main" id="{28CEDFA7-9531-E1DF-E456-C024581CE20F}"/>
+              </a:ext>
+            </a:extLst>
+          </p:cNvPr>
+          <p:cNvSpPr>
+            <a:spLocks noGrp="1"/>
+          </p:cNvSpPr>
+          <p:nvPr>
+            <p:ph type="title"/>
+          </p:nvPr>
+        </p:nvSpPr>
+        <p:spPr/>
+        <p:txBody>
+          <a:bodyPr/>
+          <a:lstStyle/>
+          <a:p>
+            <a:r>
+              <a:rPr lang="sr-Latn-RS" dirty="0"/>
+              <a:t>Druge varijante DE</a:t>
+            </a:r>
+            <a:endParaRPr lang="en-001" dirty="0"/>
+          </a:p>
+        </p:txBody>
+      </p:sp>
+      <mc:AlternateContent xmlns:mc="http://schemas.openxmlformats.org/markup-compatibility/2006">
+        <mc:Choice xmlns:a14="http://schemas.microsoft.com/office/drawing/2010/main" Requires="a14">
+          <p:sp>
+            <p:nvSpPr>
+              <p:cNvPr id="3" name="Content Placeholder 2">
+                <a:extLst>
+                  <a:ext uri="{FF2B5EF4-FFF2-40B4-BE49-F238E27FC236}">
+                    <a16:creationId xmlns:a16="http://schemas.microsoft.com/office/drawing/2014/main" id="{C4743B41-9782-EDDD-3937-1FECBE3B92A1}"/>
+                  </a:ext>
+                </a:extLst>
+              </p:cNvPr>
+              <p:cNvSpPr>
+                <a:spLocks noGrp="1"/>
+              </p:cNvSpPr>
+              <p:nvPr>
+                <p:ph idx="1"/>
+              </p:nvPr>
+            </p:nvSpPr>
+            <p:spPr/>
+            <p:txBody>
+              <a:bodyPr/>
+              <a:lstStyle/>
+              <a:p>
+                <a:r>
+                  <a:rPr lang="sr-Latn-RS" dirty="0"/>
+                  <a:t>Uvodi se notacija DE/x/y/z</a:t>
+                </a:r>
+              </a:p>
+              <a:p>
+                <a:pPr lvl="1"/>
+                <a:r>
+                  <a:rPr lang="sr-Latn-RS" i="1" dirty="0"/>
+                  <a:t>x</a:t>
+                </a:r>
+                <a:r>
+                  <a:rPr lang="sr-Latn-RS" dirty="0"/>
+                  <a:t> - način izbora jedinke koja će biti mutirana</a:t>
+                </a:r>
+              </a:p>
+              <a:p>
+                <a:pPr lvl="1"/>
+                <a:r>
+                  <a:rPr lang="sr-Latn-RS" i="1" dirty="0"/>
+                  <a:t>y</a:t>
+                </a:r>
+                <a:r>
+                  <a:rPr lang="sr-Latn-RS" dirty="0"/>
+                  <a:t> - broj razlika jedinki koje učestvuju u mutaciji</a:t>
+                </a:r>
+              </a:p>
+              <a:p>
+                <a:pPr lvl="1"/>
+                <a:r>
+                  <a:rPr lang="sr-Latn-RS" i="1" dirty="0"/>
+                  <a:t>z</a:t>
+                </a:r>
+                <a:r>
+                  <a:rPr lang="sr-Latn-RS" dirty="0"/>
+                  <a:t> - krosover shemu</a:t>
+                </a:r>
+              </a:p>
+              <a:p>
+                <a:r>
+                  <a:rPr lang="sr-Latn-RS" dirty="0"/>
+                  <a:t>Osnovna strategija je DE/</a:t>
+                </a:r>
+                <a:r>
+                  <a:rPr lang="sr-Latn-RS" dirty="0" err="1"/>
+                  <a:t>rand</a:t>
+                </a:r>
+                <a:r>
+                  <a:rPr lang="sr-Latn-RS" dirty="0"/>
+                  <a:t>/1/</a:t>
+                </a:r>
+                <a:r>
+                  <a:rPr lang="sr-Latn-RS" dirty="0" err="1"/>
+                  <a:t>bin</a:t>
+                </a:r>
+                <a:endParaRPr lang="sr-Latn-RS" dirty="0"/>
+              </a:p>
+              <a:p>
+                <a:r>
+                  <a:rPr lang="sr-Latn-RS" dirty="0"/>
+                  <a:t>Popularna strategija DE/</a:t>
+                </a:r>
+                <a:r>
+                  <a:rPr lang="sr-Latn-RS" dirty="0" err="1"/>
+                  <a:t>best</a:t>
+                </a:r>
+                <a:r>
+                  <a:rPr lang="sr-Latn-RS" dirty="0"/>
+                  <a:t>/2/</a:t>
+                </a:r>
+                <a:r>
+                  <a:rPr lang="sr-Latn-RS" dirty="0" err="1"/>
+                  <a:t>bin</a:t>
+                </a:r>
+                <a:endParaRPr lang="sr-Latn-RS" dirty="0"/>
+              </a:p>
+              <a:p>
+                <a:pPr marL="0" indent="0">
+                  <a:buNone/>
+                </a:pPr>
+                <a14:m>
+                  <m:oMathPara xmlns:m="http://schemas.openxmlformats.org/officeDocument/2006/math">
+                    <m:oMathParaPr>
+                      <m:jc m:val="centerGroup"/>
+                    </m:oMathParaPr>
+                    <m:oMath xmlns:m="http://schemas.openxmlformats.org/officeDocument/2006/math">
+                      <m:r>
+                        <a:rPr lang="sr-Latn-RS" i="1"/>
+                        <m:t>𝑧</m:t>
+                      </m:r>
+                      <m:r>
+                        <a:rPr lang="sr-Latn-RS" i="1"/>
+                        <m:t>=</m:t>
+                      </m:r>
+                      <m:r>
+                        <a:rPr lang="sr-Latn-RS" i="1"/>
+                        <m:t>𝑏𝑒𝑠𝑡</m:t>
+                      </m:r>
+                      <m:r>
+                        <a:rPr lang="sr-Latn-RS" i="1"/>
+                        <m:t>+ </m:t>
+                      </m:r>
+                      <m:r>
+                        <a:rPr lang="sr-Latn-RS" i="1"/>
+                        <m:t>𝜆</m:t>
+                      </m:r>
+                      <m:r>
+                        <a:rPr lang="sr-Latn-RS" i="1"/>
+                        <m:t>∙</m:t>
+                      </m:r>
+                      <m:d>
+                        <m:dPr>
+                          <m:ctrlPr>
+                            <a:rPr lang="en-001" i="1"/>
+                          </m:ctrlPr>
+                        </m:dPr>
+                        <m:e>
+                          <m:r>
+                            <a:rPr lang="sr-Latn-RS" i="1"/>
+                            <m:t>𝑎</m:t>
+                          </m:r>
+                          <m:r>
+                            <a:rPr lang="sr-Latn-RS" i="1"/>
+                            <m:t>−</m:t>
+                          </m:r>
+                          <m:r>
+                            <a:rPr lang="sr-Latn-RS" i="1"/>
+                            <m:t>𝑏</m:t>
+                          </m:r>
+                        </m:e>
+                      </m:d>
+                      <m:r>
+                        <a:rPr lang="sr-Latn-RS" i="1"/>
+                        <m:t>+</m:t>
+                      </m:r>
+                      <m:r>
+                        <a:rPr lang="sr-Latn-RS" i="1"/>
+                        <m:t>𝜔</m:t>
+                      </m:r>
+                      <m:r>
+                        <a:rPr lang="sr-Latn-RS" i="1"/>
+                        <m:t>∙</m:t>
+                      </m:r>
+                      <m:d>
+                        <m:dPr>
+                          <m:ctrlPr>
+                            <a:rPr lang="en-001" i="1"/>
+                          </m:ctrlPr>
+                        </m:dPr>
+                        <m:e>
+                          <m:r>
+                            <a:rPr lang="sr-Latn-RS" i="1"/>
+                            <m:t>𝑐</m:t>
+                          </m:r>
+                          <m:r>
+                            <a:rPr lang="sr-Latn-RS" i="1"/>
+                            <m:t>−</m:t>
+                          </m:r>
+                          <m:r>
+                            <a:rPr lang="sr-Latn-RS" i="1"/>
+                            <m:t>𝑑</m:t>
+                          </m:r>
+                        </m:e>
+                      </m:d>
+                    </m:oMath>
+                  </m:oMathPara>
+                </a14:m>
+                <a:endParaRPr lang="sr-Latn-RS" dirty="0"/>
+              </a:p>
+              <a:p>
+                <a:r>
+                  <a:rPr lang="sr-Latn-RS" dirty="0"/>
+                  <a:t>Za velike populacije poboljšava diverzitet.</a:t>
+                </a:r>
+                <a:endParaRPr lang="en-001" dirty="0"/>
+              </a:p>
+            </p:txBody>
+          </p:sp>
+        </mc:Choice>
+        <mc:Fallback>
+          <p:sp>
+            <p:nvSpPr>
+              <p:cNvPr id="3" name="Content Placeholder 2">
+                <a:extLst>
+                  <a:ext uri="{FF2B5EF4-FFF2-40B4-BE49-F238E27FC236}">
+                    <a16:creationId xmlns:a16="http://schemas.microsoft.com/office/drawing/2014/main" id="{C4743B41-9782-EDDD-3937-1FECBE3B92A1}"/>
+                  </a:ext>
+                </a:extLst>
+              </p:cNvPr>
+              <p:cNvSpPr>
+                <a:spLocks noGrp="1" noRot="1" noChangeAspect="1" noMove="1" noResize="1" noEditPoints="1" noAdjustHandles="1" noChangeArrowheads="1" noChangeShapeType="1" noTextEdit="1"/>
+              </p:cNvSpPr>
+              <p:nvPr>
+                <p:ph idx="1"/>
+              </p:nvPr>
+            </p:nvSpPr>
+            <p:spPr>
+              <a:blipFill>
+                <a:blip r:embed="rId2"/>
+                <a:stretch>
+                  <a:fillRect l="-1043" t="-2241"/>
+                </a:stretch>
+              </a:blipFill>
+            </p:spPr>
+            <p:txBody>
+              <a:bodyPr/>
+              <a:lstStyle/>
+              <a:p>
+                <a:r>
+                  <a:rPr lang="en-001">
+                    <a:noFill/>
+                  </a:rPr>
+                  <a:t> </a:t>
+                </a:r>
+              </a:p>
+            </p:txBody>
+          </p:sp>
+        </mc:Fallback>
+      </mc:AlternateContent>
+    </p:spTree>
+    <p:extLst>
+      <p:ext uri="{BB962C8B-B14F-4D97-AF65-F5344CB8AC3E}">
+        <p14:creationId xmlns:p14="http://schemas.microsoft.com/office/powerpoint/2010/main" val="2453301723"/>
+      </p:ext>
+    </p:extLst>
+  </p:cSld>
+  <p:clrMapOvr>
+    <a:masterClrMapping/>
+  </p:clrMapOvr>
+</p:sld>
+</file>
+
+<file path=ppt/slides/slide6.xml><?xml version="1.0" encoding="utf-8"?>
+<p:sld xmlns:a="http://schemas.openxmlformats.org/drawingml/2006/main" xmlns:r="http://schemas.openxmlformats.org/officeDocument/2006/relationships" xmlns:p="http://schemas.openxmlformats.org/presentationml/2006/main">
+  <p:cSld>
+    <p:spTree>
+      <p:nvGrpSpPr>
+        <p:cNvPr id="1" name=""/>
+        <p:cNvGrpSpPr/>
+        <p:nvPr/>
+      </p:nvGrpSpPr>
+      <p:grpSpPr>
+        <a:xfrm>
+          <a:off x="0" y="0"/>
+          <a:ext cx="0" cy="0"/>
+          <a:chOff x="0" y="0"/>
+          <a:chExt cx="0" cy="0"/>
+        </a:xfrm>
+      </p:grpSpPr>
+      <p:sp>
+        <p:nvSpPr>
+          <p:cNvPr id="2" name="Title 1">
+            <a:extLst>
+              <a:ext uri="{FF2B5EF4-FFF2-40B4-BE49-F238E27FC236}">
+                <a16:creationId xmlns:a16="http://schemas.microsoft.com/office/drawing/2014/main" id="{6AFD413E-DD90-EF33-F833-4C52A8125200}"/>
+              </a:ext>
+            </a:extLst>
+          </p:cNvPr>
+          <p:cNvSpPr>
+            <a:spLocks noGrp="1"/>
+          </p:cNvSpPr>
+          <p:nvPr>
+            <p:ph type="title"/>
+          </p:nvPr>
+        </p:nvSpPr>
+        <p:spPr/>
+        <p:txBody>
+          <a:bodyPr/>
+          <a:lstStyle/>
+          <a:p>
+            <a:r>
+              <a:rPr lang="sr-Latn-RS" dirty="0"/>
+              <a:t>Stohastička diferencijalna evolucija (SDE)</a:t>
+            </a:r>
+            <a:endParaRPr lang="en-001" dirty="0"/>
+          </a:p>
+        </p:txBody>
+      </p:sp>
+      <mc:AlternateContent xmlns:mc="http://schemas.openxmlformats.org/markup-compatibility/2006">
+        <mc:Choice xmlns:a14="http://schemas.microsoft.com/office/drawing/2010/main" Requires="a14">
+          <p:sp>
+            <p:nvSpPr>
+              <p:cNvPr id="3" name="Content Placeholder 2">
+                <a:extLst>
+                  <a:ext uri="{FF2B5EF4-FFF2-40B4-BE49-F238E27FC236}">
+                    <a16:creationId xmlns:a16="http://schemas.microsoft.com/office/drawing/2014/main" id="{1855EF37-1966-2410-DFC6-05BF9271D368}"/>
+                  </a:ext>
+                </a:extLst>
+              </p:cNvPr>
+              <p:cNvSpPr>
+                <a:spLocks noGrp="1"/>
+              </p:cNvSpPr>
+              <p:nvPr>
+                <p:ph idx="1"/>
+              </p:nvPr>
+            </p:nvSpPr>
+            <p:spPr/>
+            <p:txBody>
+              <a:bodyPr/>
+              <a:lstStyle/>
+              <a:p>
+                <a:r>
+                  <a:rPr lang="sr-Latn-RS" dirty="0" err="1"/>
+                  <a:t>Samoadaptivna</a:t>
+                </a:r>
+                <a:r>
+                  <a:rPr lang="sr-Latn-RS" dirty="0"/>
+                  <a:t> modifikacija diferencijalne evolucije</a:t>
+                </a:r>
+              </a:p>
+              <a:p>
+                <a:r>
+                  <a:rPr lang="sr-Latn-RS" dirty="0"/>
+                  <a:t>Za svaku jedinku u populaciji generišemo kontrolne parametre.</a:t>
+                </a:r>
+              </a:p>
+              <a:p>
+                <a:r>
+                  <a:rPr lang="sr-Latn-RS" dirty="0"/>
+                  <a:t>Faktor mutacije inicijalno generiše iz </a:t>
+                </a:r>
+                <a:r>
+                  <a:rPr lang="sr-Latn-RS" i="1" dirty="0"/>
+                  <a:t>N(0,5, 0,15)</a:t>
+                </a:r>
+                <a:r>
+                  <a:rPr lang="sr-Latn-RS" dirty="0"/>
+                  <a:t>, a zatim po iteracijama</a:t>
+                </a:r>
+              </a:p>
+              <a:p>
+                <a:pPr marL="0" indent="0">
+                  <a:buNone/>
+                </a:pPr>
+                <a14:m>
+                  <m:oMathPara xmlns:m="http://schemas.openxmlformats.org/officeDocument/2006/math">
+                    <m:oMathParaPr>
+                      <m:jc m:val="centerGroup"/>
+                    </m:oMathParaPr>
+                    <m:oMath xmlns:m="http://schemas.openxmlformats.org/officeDocument/2006/math">
+                      <m:r>
+                        <a:rPr lang="sr-Latn-RS" i="1"/>
+                        <m:t>𝜔</m:t>
+                      </m:r>
+                      <m:r>
+                        <a:rPr lang="sr-Latn-RS" i="1"/>
+                        <m:t>= </m:t>
+                      </m:r>
+                      <m:sSub>
+                        <m:sSubPr>
+                          <m:ctrlPr>
+                            <a:rPr lang="en-001" i="1"/>
+                          </m:ctrlPr>
+                        </m:sSubPr>
+                        <m:e>
+                          <m:r>
+                            <a:rPr lang="sr-Latn-RS" i="1"/>
+                            <m:t>𝜔</m:t>
+                          </m:r>
+                        </m:e>
+                        <m:sub>
+                          <m:r>
+                            <a:rPr lang="sr-Latn-RS" i="1"/>
+                            <m:t>1</m:t>
+                          </m:r>
+                        </m:sub>
+                      </m:sSub>
+                      <m:r>
+                        <a:rPr lang="sr-Latn-RS" i="1"/>
+                        <m:t>+</m:t>
+                      </m:r>
+                      <m:r>
+                        <a:rPr lang="sr-Latn-RS" i="1"/>
+                        <m:t>𝒩</m:t>
+                      </m:r>
+                      <m:d>
+                        <m:dPr>
+                          <m:ctrlPr>
+                            <a:rPr lang="en-001" i="1"/>
+                          </m:ctrlPr>
+                        </m:dPr>
+                        <m:e>
+                          <m:r>
+                            <a:rPr lang="sr-Latn-RS" i="1"/>
+                            <m:t>0, 0.5</m:t>
+                          </m:r>
+                        </m:e>
+                      </m:d>
+                      <m:r>
+                        <a:rPr lang="sr-Latn-RS" i="1"/>
+                        <m:t>∙ </m:t>
+                      </m:r>
+                      <m:d>
+                        <m:dPr>
+                          <m:ctrlPr>
+                            <a:rPr lang="en-001" i="1"/>
+                          </m:ctrlPr>
+                        </m:dPr>
+                        <m:e>
+                          <m:sSub>
+                            <m:sSubPr>
+                              <m:ctrlPr>
+                                <a:rPr lang="en-001" i="1"/>
+                              </m:ctrlPr>
+                            </m:sSubPr>
+                            <m:e>
+                              <m:r>
+                                <a:rPr lang="sr-Latn-RS" i="1"/>
+                                <m:t>𝜔</m:t>
+                              </m:r>
+                            </m:e>
+                            <m:sub>
+                              <m:r>
+                                <a:rPr lang="sr-Latn-RS" i="1"/>
+                                <m:t>2</m:t>
+                              </m:r>
+                            </m:sub>
+                          </m:sSub>
+                          <m:r>
+                            <a:rPr lang="sr-Latn-RS" i="1"/>
+                            <m:t>−</m:t>
+                          </m:r>
+                          <m:sSub>
+                            <m:sSubPr>
+                              <m:ctrlPr>
+                                <a:rPr lang="en-001" i="1"/>
+                              </m:ctrlPr>
+                            </m:sSubPr>
+                            <m:e>
+                              <m:r>
+                                <a:rPr lang="sr-Latn-RS" i="1"/>
+                                <m:t>𝜔</m:t>
+                              </m:r>
+                            </m:e>
+                            <m:sub>
+                              <m:r>
+                                <a:rPr lang="sr-Latn-RS" i="1"/>
+                                <m:t>3</m:t>
+                              </m:r>
+                            </m:sub>
+                          </m:sSub>
+                        </m:e>
+                      </m:d>
+                    </m:oMath>
+                  </m:oMathPara>
+                </a14:m>
+                <a:endParaRPr lang="en-001" dirty="0"/>
+              </a:p>
+              <a:p>
+                <a:r>
+                  <a:rPr lang="sr-Latn-RS" dirty="0"/>
+                  <a:t>Umesto parametra p koristimo normalnu raspodelu, tako da</a:t>
+                </a:r>
+              </a:p>
+              <a:p>
+                <a:pPr marL="0" indent="0">
+                  <a:buNone/>
+                </a:pPr>
+                <a:r>
+                  <a:rPr lang="sr-Latn-RS" dirty="0"/>
+                  <a:t>			r &lt; N(0,5, 0,15)</a:t>
+                </a:r>
+              </a:p>
+              <a:p>
+                <a:r>
+                  <a:rPr lang="sr-Latn-RS" dirty="0"/>
+                  <a:t>Osnovna modifikacija se odnosi na DE/</a:t>
+                </a:r>
+                <a:r>
+                  <a:rPr lang="sr-Latn-RS" dirty="0" err="1"/>
+                  <a:t>rand</a:t>
+                </a:r>
+                <a:r>
+                  <a:rPr lang="sr-Latn-RS" dirty="0"/>
+                  <a:t>/1/</a:t>
+                </a:r>
+                <a:r>
+                  <a:rPr lang="sr-Latn-RS" dirty="0" err="1"/>
+                  <a:t>bin</a:t>
+                </a:r>
+                <a:r>
+                  <a:rPr lang="sr-Latn-RS" dirty="0"/>
+                  <a:t>, ali može se adaptirati i za druge strategije</a:t>
+                </a:r>
+                <a:endParaRPr lang="en-001" dirty="0"/>
+              </a:p>
+            </p:txBody>
+          </p:sp>
+        </mc:Choice>
+        <mc:Fallback>
+          <p:sp>
+            <p:nvSpPr>
+              <p:cNvPr id="3" name="Content Placeholder 2">
+                <a:extLst>
+                  <a:ext uri="{FF2B5EF4-FFF2-40B4-BE49-F238E27FC236}">
+                    <a16:creationId xmlns:a16="http://schemas.microsoft.com/office/drawing/2014/main" id="{1855EF37-1966-2410-DFC6-05BF9271D368}"/>
+                  </a:ext>
+                </a:extLst>
+              </p:cNvPr>
+              <p:cNvSpPr>
+                <a:spLocks noGrp="1" noRot="1" noChangeAspect="1" noMove="1" noResize="1" noEditPoints="1" noAdjustHandles="1" noChangeArrowheads="1" noChangeShapeType="1" noTextEdit="1"/>
+              </p:cNvSpPr>
+              <p:nvPr>
+                <p:ph idx="1"/>
+              </p:nvPr>
+            </p:nvSpPr>
+            <p:spPr>
+              <a:blipFill>
+                <a:blip r:embed="rId2"/>
+                <a:stretch>
+                  <a:fillRect l="-1043" t="-2241" b="-140"/>
+                </a:stretch>
+              </a:blipFill>
+            </p:spPr>
+            <p:txBody>
+              <a:bodyPr/>
+              <a:lstStyle/>
+              <a:p>
+                <a:r>
+                  <a:rPr lang="en-001">
+                    <a:noFill/>
+                  </a:rPr>
+                  <a:t> </a:t>
+                </a:r>
+              </a:p>
+            </p:txBody>
+          </p:sp>
+        </mc:Fallback>
+      </mc:AlternateContent>
+    </p:spTree>
+    <p:extLst>
+      <p:ext uri="{BB962C8B-B14F-4D97-AF65-F5344CB8AC3E}">
+        <p14:creationId xmlns:p14="http://schemas.microsoft.com/office/powerpoint/2010/main" val="932004972"/>
+      </p:ext>
+    </p:extLst>
+  </p:cSld>
+  <p:clrMapOvr>
+    <a:masterClrMapping/>
+  </p:clrMapOvr>
+</p:sld>
+</file>
+
+<file path=ppt/slides/slide7.xml><?xml version="1.0" encoding="utf-8"?>
+<p:sld xmlns:a="http://schemas.openxmlformats.org/drawingml/2006/main" xmlns:r="http://schemas.openxmlformats.org/officeDocument/2006/relationships" xmlns:p="http://schemas.openxmlformats.org/presentationml/2006/main">
+  <p:cSld>
+    <p:spTree>
+      <p:nvGrpSpPr>
+        <p:cNvPr id="1" name=""/>
+        <p:cNvGrpSpPr/>
+        <p:nvPr/>
+      </p:nvGrpSpPr>
+      <p:grpSpPr>
+        <a:xfrm>
+          <a:off x="0" y="0"/>
+          <a:ext cx="0" cy="0"/>
+          <a:chOff x="0" y="0"/>
+          <a:chExt cx="0" cy="0"/>
+        </a:xfrm>
+      </p:grpSpPr>
+      <p:sp>
+        <p:nvSpPr>
+          <p:cNvPr id="2" name="Title 1">
+            <a:extLst>
+              <a:ext uri="{FF2B5EF4-FFF2-40B4-BE49-F238E27FC236}">
+                <a16:creationId xmlns:a16="http://schemas.microsoft.com/office/drawing/2014/main" id="{EF5C1741-92C4-B3A7-AFA0-9455B4C7A22B}"/>
+              </a:ext>
+            </a:extLst>
+          </p:cNvPr>
+          <p:cNvSpPr>
+            <a:spLocks noGrp="1"/>
+          </p:cNvSpPr>
+          <p:nvPr>
+            <p:ph type="title"/>
+          </p:nvPr>
+        </p:nvSpPr>
+        <p:spPr/>
+        <p:txBody>
+          <a:bodyPr/>
+          <a:lstStyle/>
+          <a:p>
+            <a:r>
+              <a:rPr lang="sr-Latn-RS" dirty="0"/>
+              <a:t>Ograničenja domena pretrage</a:t>
+            </a:r>
+            <a:endParaRPr lang="en-001" dirty="0"/>
+          </a:p>
+        </p:txBody>
+      </p:sp>
+      <mc:AlternateContent xmlns:mc="http://schemas.openxmlformats.org/markup-compatibility/2006">
+        <mc:Choice xmlns:a14="http://schemas.microsoft.com/office/drawing/2010/main" Requires="a14">
+          <p:sp>
+            <p:nvSpPr>
+              <p:cNvPr id="3" name="Content Placeholder 2">
+                <a:extLst>
+                  <a:ext uri="{FF2B5EF4-FFF2-40B4-BE49-F238E27FC236}">
+                    <a16:creationId xmlns:a16="http://schemas.microsoft.com/office/drawing/2014/main" id="{B2366EA6-ABB5-199B-1276-9E730D7BE010}"/>
+                  </a:ext>
+                </a:extLst>
+              </p:cNvPr>
+              <p:cNvSpPr>
+                <a:spLocks noGrp="1"/>
+              </p:cNvSpPr>
+              <p:nvPr>
+                <p:ph idx="1"/>
+              </p:nvPr>
+            </p:nvSpPr>
+            <p:spPr/>
+            <p:txBody>
+              <a:bodyPr>
+                <a:normAutofit/>
+              </a:bodyPr>
+              <a:lstStyle/>
+              <a:p>
+                <a:r>
+                  <a:rPr lang="sr-Latn-RS" dirty="0"/>
+                  <a:t>Čvrsta ograničenja</a:t>
+                </a:r>
+              </a:p>
+              <a:p>
+                <a:pPr marL="0" indent="0">
+                  <a:buNone/>
+                </a:pPr>
+                <a14:m>
+                  <m:oMathPara xmlns:m="http://schemas.openxmlformats.org/officeDocument/2006/math">
+                    <m:oMathParaPr>
+                      <m:jc m:val="centerGroup"/>
+                    </m:oMathParaPr>
+                    <m:oMath xmlns:m="http://schemas.openxmlformats.org/officeDocument/2006/math">
+                      <m:sSub>
+                        <m:sSubPr>
+                          <m:ctrlPr>
+                            <a:rPr lang="en-001" sz="2000" i="1"/>
+                          </m:ctrlPr>
+                        </m:sSubPr>
+                        <m:e>
+                          <m:r>
+                            <a:rPr lang="en-US" sz="2000" i="1"/>
+                            <m:t>𝑥</m:t>
+                          </m:r>
+                          <m:r>
+                            <a:rPr lang="en-US" sz="2000" i="1"/>
+                            <m:t>′</m:t>
+                          </m:r>
+                        </m:e>
+                        <m:sub>
+                          <m:r>
+                            <a:rPr lang="en-US" sz="2000" i="1"/>
+                            <m:t>𝑖</m:t>
+                          </m:r>
+                        </m:sub>
+                      </m:sSub>
+                      <m:r>
+                        <a:rPr lang="en-US" sz="2000" i="1"/>
+                        <m:t>=</m:t>
+                      </m:r>
+                      <m:d>
+                        <m:dPr>
+                          <m:begChr m:val="{"/>
+                          <m:endChr m:val=""/>
+                          <m:ctrlPr>
+                            <a:rPr lang="en-001" sz="2000" i="1"/>
+                          </m:ctrlPr>
+                        </m:dPr>
+                        <m:e>
+                          <m:eqArr>
+                            <m:eqArrPr>
+                              <m:ctrlPr>
+                                <a:rPr lang="en-001" sz="2000" i="1"/>
+                              </m:ctrlPr>
+                            </m:eqArrPr>
+                            <m:e>
+                              <m:sSub>
+                                <m:sSubPr>
+                                  <m:ctrlPr>
+                                    <a:rPr lang="en-001" sz="2000" i="1"/>
+                                  </m:ctrlPr>
+                                </m:sSubPr>
+                                <m:e>
+                                  <m:r>
+                                    <a:rPr lang="en-US" sz="2000" i="1"/>
+                                    <m:t>𝑥</m:t>
+                                  </m:r>
+                                </m:e>
+                                <m:sub>
+                                  <m:r>
+                                    <a:rPr lang="en-US" sz="2000" i="1"/>
+                                    <m:t>𝑖</m:t>
+                                  </m:r>
+                                  <m:r>
+                                    <a:rPr lang="en-US" sz="2000" i="1"/>
+                                    <m:t>, </m:t>
+                                  </m:r>
+                                  <m:r>
+                                    <a:rPr lang="en-US" sz="2000" i="1"/>
+                                    <m:t>𝑙𝑜𝑤𝑒𝑟</m:t>
+                                  </m:r>
+                                </m:sub>
+                              </m:sSub>
+                              <m:r>
+                                <a:rPr lang="en-US" sz="2000" i="1"/>
+                                <m:t>+</m:t>
+                              </m:r>
+                              <m:r>
+                                <a:rPr lang="en-US" sz="2000" i="1"/>
+                                <m:t>𝑟𝑎𝑛𝑑</m:t>
+                              </m:r>
+                              <m:r>
+                                <a:rPr lang="en-US" sz="2000" i="1"/>
+                                <m:t>∙</m:t>
+                              </m:r>
+                              <m:d>
+                                <m:dPr>
+                                  <m:ctrlPr>
+                                    <a:rPr lang="en-001" sz="2000" i="1"/>
+                                  </m:ctrlPr>
+                                </m:dPr>
+                                <m:e>
+                                  <m:sSub>
+                                    <m:sSubPr>
+                                      <m:ctrlPr>
+                                        <a:rPr lang="en-001" sz="2000" i="1"/>
+                                      </m:ctrlPr>
+                                    </m:sSubPr>
+                                    <m:e>
+                                      <m:r>
+                                        <a:rPr lang="en-US" sz="2000" i="1"/>
+                                        <m:t>𝑥</m:t>
+                                      </m:r>
+                                    </m:e>
+                                    <m:sub>
+                                      <m:r>
+                                        <a:rPr lang="en-US" sz="2000" i="1"/>
+                                        <m:t>𝑖</m:t>
+                                      </m:r>
+                                      <m:r>
+                                        <a:rPr lang="en-US" sz="2000" i="1"/>
+                                        <m:t>,</m:t>
+                                      </m:r>
+                                      <m:r>
+                                        <a:rPr lang="en-US" sz="2000" i="1"/>
+                                        <m:t>𝑢𝑝𝑝𝑒𝑟</m:t>
+                                      </m:r>
+                                    </m:sub>
+                                  </m:sSub>
+                                  <m:r>
+                                    <a:rPr lang="en-US" sz="2000" i="1"/>
+                                    <m:t>−</m:t>
+                                  </m:r>
+                                  <m:sSub>
+                                    <m:sSubPr>
+                                      <m:ctrlPr>
+                                        <a:rPr lang="en-001" sz="2000" i="1"/>
+                                      </m:ctrlPr>
+                                    </m:sSubPr>
+                                    <m:e>
+                                      <m:r>
+                                        <a:rPr lang="en-US" sz="2000" i="1"/>
+                                        <m:t>𝑥</m:t>
+                                      </m:r>
+                                    </m:e>
+                                    <m:sub>
+                                      <m:r>
+                                        <a:rPr lang="en-US" sz="2000" i="1"/>
+                                        <m:t>𝑖</m:t>
+                                      </m:r>
+                                      <m:r>
+                                        <a:rPr lang="en-US" sz="2000" i="1"/>
+                                        <m:t>,</m:t>
+                                      </m:r>
+                                      <m:r>
+                                        <a:rPr lang="en-US" sz="2000" i="1"/>
+                                        <m:t>𝑙𝑜𝑤𝑒𝑟</m:t>
+                                      </m:r>
+                                    </m:sub>
+                                  </m:sSub>
+                                </m:e>
+                              </m:d>
+                              <m:r>
+                                <a:rPr lang="en-US" sz="2000" i="1"/>
+                                <m:t>, </m:t>
+                              </m:r>
+                              <m:r>
+                                <a:rPr lang="en-US" sz="2000" i="1"/>
+                                <m:t>𝑎𝑘𝑜</m:t>
+                              </m:r>
+                              <m:r>
+                                <a:rPr lang="en-US" sz="2000" i="1"/>
+                                <m:t> </m:t>
+                              </m:r>
+                              <m:sSub>
+                                <m:sSubPr>
+                                  <m:ctrlPr>
+                                    <a:rPr lang="en-001" sz="2000" i="1"/>
+                                  </m:ctrlPr>
+                                </m:sSubPr>
+                                <m:e>
+                                  <m:sSup>
+                                    <m:sSupPr>
+                                      <m:ctrlPr>
+                                        <a:rPr lang="en-001" sz="2000" i="1"/>
+                                      </m:ctrlPr>
+                                    </m:sSupPr>
+                                    <m:e>
+                                      <m:r>
+                                        <a:rPr lang="en-US" sz="2000" i="1"/>
+                                        <m:t>𝑥</m:t>
+                                      </m:r>
+                                    </m:e>
+                                    <m:sup>
+                                      <m:r>
+                                        <a:rPr lang="en-US" sz="2000" i="1"/>
+                                        <m:t>′</m:t>
+                                      </m:r>
+                                    </m:sup>
+                                  </m:sSup>
+                                </m:e>
+                                <m:sub>
+                                  <m:r>
+                                    <a:rPr lang="en-US" sz="2000" i="1"/>
+                                    <m:t>𝑖</m:t>
+                                  </m:r>
+                                </m:sub>
+                              </m:sSub>
+                              <m:r>
+                                <a:rPr lang="en-US" sz="2000" i="1"/>
+                                <m:t>&lt;</m:t>
+                              </m:r>
+                              <m:sSub>
+                                <m:sSubPr>
+                                  <m:ctrlPr>
+                                    <a:rPr lang="en-001" sz="2000" i="1"/>
+                                  </m:ctrlPr>
+                                </m:sSubPr>
+                                <m:e>
+                                  <m:r>
+                                    <a:rPr lang="en-US" sz="2000" i="1"/>
+                                    <m:t>𝑥</m:t>
+                                  </m:r>
+                                </m:e>
+                                <m:sub>
+                                  <m:r>
+                                    <a:rPr lang="en-US" sz="2000" i="1"/>
+                                    <m:t>𝑖</m:t>
+                                  </m:r>
+                                  <m:r>
+                                    <a:rPr lang="en-US" sz="2000" i="1"/>
+                                    <m:t>,</m:t>
+                                  </m:r>
+                                  <m:r>
+                                    <a:rPr lang="en-US" sz="2000" i="1"/>
+                                    <m:t>𝑙𝑜𝑤𝑒𝑟</m:t>
+                                  </m:r>
+                                </m:sub>
+                              </m:sSub>
+                              <m:r>
+                                <a:rPr lang="en-US" sz="2000" i="1"/>
+                                <m:t> </m:t>
+                              </m:r>
+                              <m:r>
+                                <a:rPr lang="en-US" sz="2000" i="1"/>
+                                <m:t>𝑖𝑙𝑖</m:t>
+                              </m:r>
+                              <m:r>
+                                <a:rPr lang="en-US" sz="2000" i="1"/>
+                                <m:t> </m:t>
+                              </m:r>
+                              <m:sSub>
+                                <m:sSubPr>
+                                  <m:ctrlPr>
+                                    <a:rPr lang="en-001" sz="2000" i="1"/>
+                                  </m:ctrlPr>
+                                </m:sSubPr>
+                                <m:e>
+                                  <m:r>
+                                    <a:rPr lang="en-US" sz="2000" i="1"/>
+                                    <m:t>𝑥</m:t>
+                                  </m:r>
+                                </m:e>
+                                <m:sub>
+                                  <m:r>
+                                    <a:rPr lang="en-US" sz="2000" i="1"/>
+                                    <m:t>𝑖</m:t>
+                                  </m:r>
+                                  <m:r>
+                                    <a:rPr lang="en-US" sz="2000" i="1"/>
+                                    <m:t>,</m:t>
+                                  </m:r>
+                                  <m:r>
+                                    <a:rPr lang="en-US" sz="2000" i="1"/>
+                                    <m:t>𝑢𝑝𝑝𝑒𝑟</m:t>
+                                  </m:r>
+                                </m:sub>
+                              </m:sSub>
+                              <m:r>
+                                <a:rPr lang="en-US" sz="2000" i="1"/>
+                                <m:t>&lt; </m:t>
+                              </m:r>
+                              <m:sSub>
+                                <m:sSubPr>
+                                  <m:ctrlPr>
+                                    <a:rPr lang="en-001" sz="2000" i="1"/>
+                                  </m:ctrlPr>
+                                </m:sSubPr>
+                                <m:e>
+                                  <m:sSup>
+                                    <m:sSupPr>
+                                      <m:ctrlPr>
+                                        <a:rPr lang="en-001" sz="2000" i="1"/>
+                                      </m:ctrlPr>
+                                    </m:sSupPr>
+                                    <m:e>
+                                      <m:r>
+                                        <a:rPr lang="en-US" sz="2000" i="1"/>
+                                        <m:t>𝑥</m:t>
+                                      </m:r>
+                                    </m:e>
+                                    <m:sup>
+                                      <m:r>
+                                        <a:rPr lang="en-US" sz="2000" i="1"/>
+                                        <m:t>′</m:t>
+                                      </m:r>
+                                    </m:sup>
+                                  </m:sSup>
+                                </m:e>
+                                <m:sub>
+                                  <m:r>
+                                    <a:rPr lang="en-US" sz="2000" i="1"/>
+                                    <m:t>𝑖</m:t>
+                                  </m:r>
+                                </m:sub>
+                              </m:sSub>
+                            </m:e>
+                            <m:e>
+                              <m:sSub>
+                                <m:sSubPr>
+                                  <m:ctrlPr>
+                                    <a:rPr lang="en-001" sz="2000" i="1"/>
+                                  </m:ctrlPr>
+                                </m:sSubPr>
+                                <m:e>
+                                  <m:r>
+                                    <a:rPr lang="en-US" sz="2000" i="1"/>
+                                    <m:t>𝑥</m:t>
+                                  </m:r>
+                                  <m:r>
+                                    <a:rPr lang="en-US" sz="2000" i="1"/>
+                                    <m:t>′</m:t>
+                                  </m:r>
+                                </m:e>
+                                <m:sub>
+                                  <m:r>
+                                    <a:rPr lang="en-US" sz="2000" i="1"/>
+                                    <m:t>𝑖</m:t>
+                                  </m:r>
+                                </m:sub>
+                              </m:sSub>
+                              <m:r>
+                                <a:rPr lang="en-US" sz="2000" i="1"/>
+                                <m:t>, </m:t>
+                              </m:r>
+                              <m:r>
+                                <a:rPr lang="en-US" sz="2000" i="1"/>
+                                <m:t>𝑖𝑛𝑎</m:t>
+                              </m:r>
+                              <m:r>
+                                <a:rPr lang="sr-Latn-RS" sz="2000" i="1"/>
+                                <m:t>č</m:t>
+                              </m:r>
+                              <m:r>
+                                <a:rPr lang="sr-Latn-RS" sz="2000" i="1"/>
+                                <m:t>𝑒</m:t>
+                              </m:r>
+                            </m:e>
+                          </m:eqArr>
+                        </m:e>
+                      </m:d>
+                      <m:r>
+                        <a:rPr lang="en-US" sz="2000" i="1"/>
+                        <m:t>,</m:t>
+                      </m:r>
+                      <m:r>
+                        <a:rPr lang="en-US" sz="2000" i="1"/>
+                        <m:t>𝑖</m:t>
+                      </m:r>
+                      <m:r>
+                        <a:rPr lang="en-US" sz="2000" i="1"/>
+                        <m:t>∈</m:t>
+                      </m:r>
+                      <m:d>
+                        <m:dPr>
+                          <m:begChr m:val="["/>
+                          <m:endChr m:val="]"/>
+                          <m:ctrlPr>
+                            <a:rPr lang="en-001" sz="2000" i="1"/>
+                          </m:ctrlPr>
+                        </m:dPr>
+                        <m:e>
+                          <m:r>
+                            <a:rPr lang="en-US" sz="2000" i="1"/>
+                            <m:t>1, </m:t>
+                          </m:r>
+                          <m:sSub>
+                            <m:sSubPr>
+                              <m:ctrlPr>
+                                <a:rPr lang="en-001" sz="2000" i="1"/>
+                              </m:ctrlPr>
+                            </m:sSubPr>
+                            <m:e>
+                              <m:r>
+                                <a:rPr lang="en-US" sz="2000" i="1"/>
+                                <m:t>𝑛</m:t>
+                              </m:r>
+                            </m:e>
+                            <m:sub>
+                              <m:r>
+                                <a:rPr lang="en-US" sz="2000" i="1"/>
+                                <m:t>𝑝𝑎𝑟𝑎𝑚</m:t>
+                              </m:r>
+                            </m:sub>
+                          </m:sSub>
+                        </m:e>
+                      </m:d>
+                    </m:oMath>
+                  </m:oMathPara>
+                </a14:m>
+                <a:endParaRPr lang="sr-Latn-RS" dirty="0"/>
+              </a:p>
+              <a:p>
+                <a:r>
+                  <a:rPr lang="sr-Latn-RS" dirty="0"/>
+                  <a:t>Meka ograničenja ne isključuju jedinke koje </a:t>
+                </a:r>
+                <a:r>
+                  <a:rPr lang="sr-Latn-RS" dirty="0" err="1"/>
+                  <a:t>izažu</a:t>
+                </a:r>
+                <a:r>
+                  <a:rPr lang="sr-Latn-RS" dirty="0"/>
+                  <a:t> iz granica, već ih </a:t>
+                </a:r>
+                <a:r>
+                  <a:rPr lang="sr-Latn-RS" dirty="0" err="1"/>
+                  <a:t>penalizuju</a:t>
+                </a:r>
+                <a:r>
+                  <a:rPr lang="sr-Latn-RS" dirty="0"/>
+                  <a:t> kroz funkcije ograničenja</a:t>
+                </a:r>
+              </a:p>
+              <a:p>
+                <a:r>
+                  <a:rPr lang="sr-Latn-RS" dirty="0"/>
+                  <a:t>Funkcija cene objedinjuje ciljnu funkciju i funkcije ograničenja</a:t>
+                </a:r>
+              </a:p>
+              <a:p>
+                <a:pPr marL="0" indent="0">
+                  <a:buNone/>
+                </a:pPr>
+                <a14:m>
+                  <m:oMathPara xmlns:m="http://schemas.openxmlformats.org/officeDocument/2006/math">
+                    <m:oMathParaPr>
+                      <m:jc m:val="centerGroup"/>
+                    </m:oMathParaPr>
+                    <m:oMath xmlns:m="http://schemas.openxmlformats.org/officeDocument/2006/math">
+                      <m:sSub>
+                        <m:sSubPr>
+                          <m:ctrlPr>
+                            <a:rPr lang="en-001" i="1"/>
+                          </m:ctrlPr>
+                        </m:sSubPr>
+                        <m:e>
+                          <m:r>
+                            <a:rPr lang="en-US" i="1"/>
+                            <m:t>𝑓</m:t>
+                          </m:r>
+                        </m:e>
+                        <m:sub>
+                          <m:r>
+                            <a:rPr lang="en-US" i="1"/>
+                            <m:t>𝑐𝑜𝑠𝑡</m:t>
+                          </m:r>
+                        </m:sub>
+                      </m:sSub>
+                      <m:d>
+                        <m:dPr>
+                          <m:ctrlPr>
+                            <a:rPr lang="en-001" i="1"/>
+                          </m:ctrlPr>
+                        </m:dPr>
+                        <m:e>
+                          <m:r>
+                            <a:rPr lang="en-US" i="1"/>
+                            <m:t>𝑥</m:t>
+                          </m:r>
+                        </m:e>
+                      </m:d>
+                      <m:r>
+                        <a:rPr lang="en-US" i="1"/>
+                        <m:t>=</m:t>
+                      </m:r>
+                      <m:sSub>
+                        <m:sSubPr>
+                          <m:ctrlPr>
+                            <a:rPr lang="en-001" i="1"/>
+                          </m:ctrlPr>
+                        </m:sSubPr>
+                        <m:e>
+                          <m:r>
+                            <a:rPr lang="en-US" i="1"/>
+                            <m:t>𝑓</m:t>
+                          </m:r>
+                        </m:e>
+                        <m:sub>
+                          <m:r>
+                            <a:rPr lang="en-US" i="1"/>
+                            <m:t>𝑜𝑏𝑗𝑒𝑐𝑡𝑖𝑣𝑒</m:t>
+                          </m:r>
+                        </m:sub>
+                      </m:sSub>
+                      <m:d>
+                        <m:dPr>
+                          <m:ctrlPr>
+                            <a:rPr lang="en-001" i="1"/>
+                          </m:ctrlPr>
+                        </m:dPr>
+                        <m:e>
+                          <m:r>
+                            <a:rPr lang="en-US" i="1"/>
+                            <m:t>𝑥</m:t>
+                          </m:r>
+                        </m:e>
+                      </m:d>
+                      <m:r>
+                        <a:rPr lang="en-US" i="1"/>
+                        <m:t>+ </m:t>
+                      </m:r>
+                      <m:nary>
+                        <m:naryPr>
+                          <m:chr m:val="∑"/>
+                          <m:limLoc m:val="undOvr"/>
+                          <m:ctrlPr>
+                            <a:rPr lang="en-001" i="1"/>
+                          </m:ctrlPr>
+                        </m:naryPr>
+                        <m:sub>
+                          <m:r>
+                            <a:rPr lang="en-US" i="1"/>
+                            <m:t>𝑖</m:t>
+                          </m:r>
+                          <m:r>
+                            <a:rPr lang="en-US" i="1"/>
+                            <m:t>=1</m:t>
+                          </m:r>
+                        </m:sub>
+                        <m:sup>
+                          <m:sSub>
+                            <m:sSubPr>
+                              <m:ctrlPr>
+                                <a:rPr lang="en-001" i="1"/>
+                              </m:ctrlPr>
+                            </m:sSubPr>
+                            <m:e>
+                              <m:r>
+                                <a:rPr lang="en-US" i="1"/>
+                                <m:t>𝑛</m:t>
+                              </m:r>
+                            </m:e>
+                            <m:sub>
+                              <m:r>
+                                <a:rPr lang="en-US" i="1"/>
+                                <m:t>𝑝𝑎𝑟𝑎𝑚</m:t>
+                              </m:r>
+                            </m:sub>
+                          </m:sSub>
+                        </m:sup>
+                        <m:e>
+                          <m:sSub>
+                            <m:sSubPr>
+                              <m:ctrlPr>
+                                <a:rPr lang="en-001" i="1"/>
+                              </m:ctrlPr>
+                            </m:sSubPr>
+                            <m:e>
+                              <m:r>
+                                <a:rPr lang="en-US" i="1"/>
+                                <m:t>𝑔</m:t>
+                              </m:r>
+                            </m:e>
+                            <m:sub>
+                              <m:r>
+                                <a:rPr lang="en-US" i="1"/>
+                                <m:t>𝑖</m:t>
+                              </m:r>
+                            </m:sub>
+                          </m:sSub>
+                          <m:r>
+                            <a:rPr lang="en-US" i="1"/>
+                            <m:t>(</m:t>
+                          </m:r>
+                          <m:r>
+                            <a:rPr lang="en-US" i="1"/>
+                            <m:t>𝑥</m:t>
+                          </m:r>
+                          <m:r>
+                            <a:rPr lang="en-US" i="1"/>
+                            <m:t>)</m:t>
+                          </m:r>
+                        </m:e>
+                      </m:nary>
+                    </m:oMath>
+                  </m:oMathPara>
+                </a14:m>
+                <a:endParaRPr lang="en-001" dirty="0"/>
+              </a:p>
+              <a:p>
+                <a:endParaRPr lang="en-001" dirty="0"/>
+              </a:p>
+            </p:txBody>
+          </p:sp>
+        </mc:Choice>
+        <mc:Fallback>
+          <p:sp>
+            <p:nvSpPr>
+              <p:cNvPr id="3" name="Content Placeholder 2">
+                <a:extLst>
+                  <a:ext uri="{FF2B5EF4-FFF2-40B4-BE49-F238E27FC236}">
+                    <a16:creationId xmlns:a16="http://schemas.microsoft.com/office/drawing/2014/main" id="{B2366EA6-ABB5-199B-1276-9E730D7BE010}"/>
+                  </a:ext>
+                </a:extLst>
+              </p:cNvPr>
+              <p:cNvSpPr>
+                <a:spLocks noGrp="1" noRot="1" noChangeAspect="1" noMove="1" noResize="1" noEditPoints="1" noAdjustHandles="1" noChangeArrowheads="1" noChangeShapeType="1" noTextEdit="1"/>
+              </p:cNvSpPr>
+              <p:nvPr>
+                <p:ph idx="1"/>
+              </p:nvPr>
+            </p:nvSpPr>
+            <p:spPr>
+              <a:blipFill>
+                <a:blip r:embed="rId2"/>
+                <a:stretch>
+                  <a:fillRect l="-1043" t="-2241"/>
+                </a:stretch>
+              </a:blipFill>
+            </p:spPr>
+            <p:txBody>
+              <a:bodyPr/>
+              <a:lstStyle/>
+              <a:p>
+                <a:r>
+                  <a:rPr lang="en-001">
+                    <a:noFill/>
+                  </a:rPr>
+                  <a:t> </a:t>
+                </a:r>
+              </a:p>
+            </p:txBody>
+          </p:sp>
+        </mc:Fallback>
+      </mc:AlternateContent>
+    </p:spTree>
+    <p:extLst>
+      <p:ext uri="{BB962C8B-B14F-4D97-AF65-F5344CB8AC3E}">
+        <p14:creationId xmlns:p14="http://schemas.microsoft.com/office/powerpoint/2010/main" val="524219232"/>
+      </p:ext>
+    </p:extLst>
+  </p:cSld>
+  <p:clrMapOvr>
+    <a:masterClrMapping/>
+  </p:clrMapOvr>
+</p:sld>
+</file>
+
+<file path=ppt/slides/slide8.xml><?xml version="1.0" encoding="utf-8"?>
+<p:sld xmlns:a="http://schemas.openxmlformats.org/drawingml/2006/main" xmlns:r="http://schemas.openxmlformats.org/officeDocument/2006/relationships" xmlns:p="http://schemas.openxmlformats.org/presentationml/2006/main">
+  <p:cSld>
+    <p:spTree>
+      <p:nvGrpSpPr>
+        <p:cNvPr id="1" name=""/>
+        <p:cNvGrpSpPr/>
+        <p:nvPr/>
+      </p:nvGrpSpPr>
+      <p:grpSpPr>
+        <a:xfrm>
+          <a:off x="0" y="0"/>
+          <a:ext cx="0" cy="0"/>
+          <a:chOff x="0" y="0"/>
+          <a:chExt cx="0" cy="0"/>
+        </a:xfrm>
+      </p:grpSpPr>
+      <p:sp>
+        <p:nvSpPr>
+          <p:cNvPr id="2" name="Title 1">
+            <a:extLst>
+              <a:ext uri="{FF2B5EF4-FFF2-40B4-BE49-F238E27FC236}">
+                <a16:creationId xmlns:a16="http://schemas.microsoft.com/office/drawing/2014/main" id="{618E9B4B-A556-9FC7-CBA4-617CDB6BEFCF}"/>
+              </a:ext>
+            </a:extLst>
+          </p:cNvPr>
+          <p:cNvSpPr>
+            <a:spLocks noGrp="1"/>
+          </p:cNvSpPr>
+          <p:nvPr>
+            <p:ph type="title"/>
+          </p:nvPr>
+        </p:nvSpPr>
+        <p:spPr/>
+        <p:txBody>
+          <a:bodyPr/>
+          <a:lstStyle/>
+          <a:p>
+            <a:r>
+              <a:rPr lang="sr-Latn-RS" dirty="0"/>
+              <a:t>Uslovi zaustavljanja</a:t>
+            </a:r>
+            <a:endParaRPr lang="en-001" dirty="0"/>
+          </a:p>
+        </p:txBody>
+      </p:sp>
+      <p:pic>
+        <p:nvPicPr>
+          <p:cNvPr id="5" name="Content Placeholder 4">
+            <a:extLst>
+              <a:ext uri="{FF2B5EF4-FFF2-40B4-BE49-F238E27FC236}">
+                <a16:creationId xmlns:a16="http://schemas.microsoft.com/office/drawing/2014/main" id="{6BD8ED74-201E-F4C0-C8E5-04E6C8227F25}"/>
+              </a:ext>
+            </a:extLst>
+          </p:cNvPr>
+          <p:cNvPicPr>
+            <a:picLocks noGrp="1" noChangeAspect="1"/>
+          </p:cNvPicPr>
+          <p:nvPr>
+            <p:ph idx="1"/>
+          </p:nvPr>
+        </p:nvPicPr>
+        <p:blipFill>
+          <a:blip r:embed="rId2">
+            <a:extLst>
+              <a:ext uri="{28A0092B-C50C-407E-A947-70E740481C1C}">
+                <a14:useLocalDpi xmlns:a14="http://schemas.microsoft.com/office/drawing/2010/main" val="0"/>
+              </a:ext>
+            </a:extLst>
+          </a:blip>
+          <a:stretch>
+            <a:fillRect/>
+          </a:stretch>
+        </p:blipFill>
+        <p:spPr>
+          <a:xfrm>
+            <a:off x="3920331" y="1825625"/>
+            <a:ext cx="4351338" cy="4351338"/>
+          </a:xfrm>
+        </p:spPr>
+      </p:pic>
+    </p:spTree>
+    <p:extLst>
+      <p:ext uri="{BB962C8B-B14F-4D97-AF65-F5344CB8AC3E}">
+        <p14:creationId xmlns:p14="http://schemas.microsoft.com/office/powerpoint/2010/main" val="1377755237"/>
+      </p:ext>
+    </p:extLst>
+  </p:cSld>
+  <p:clrMapOvr>
+    <a:masterClrMapping/>
+  </p:clrMapOvr>
+</p:sld>
+</file>
+
+<file path=ppt/slides/slide9.xml><?xml version="1.0" encoding="utf-8"?>
+<p:sld xmlns:a="http://schemas.openxmlformats.org/drawingml/2006/main" xmlns:r="http://schemas.openxmlformats.org/officeDocument/2006/relationships" xmlns:p="http://schemas.openxmlformats.org/presentationml/2006/main">
+  <p:cSld>
+    <p:spTree>
+      <p:nvGrpSpPr>
+        <p:cNvPr id="1" name=""/>
+        <p:cNvGrpSpPr/>
+        <p:nvPr/>
+      </p:nvGrpSpPr>
+      <p:grpSpPr>
+        <a:xfrm>
+          <a:off x="0" y="0"/>
+          <a:ext cx="0" cy="0"/>
+          <a:chOff x="0" y="0"/>
+          <a:chExt cx="0" cy="0"/>
+        </a:xfrm>
+      </p:grpSpPr>
+      <p:sp>
+        <p:nvSpPr>
+          <p:cNvPr id="2" name="Title 1">
+            <a:extLst>
+              <a:ext uri="{FF2B5EF4-FFF2-40B4-BE49-F238E27FC236}">
+                <a16:creationId xmlns:a16="http://schemas.microsoft.com/office/drawing/2014/main" id="{76C64D89-CC17-97CA-59FA-3C757EF73DE0}"/>
+              </a:ext>
+            </a:extLst>
+          </p:cNvPr>
+          <p:cNvSpPr>
+            <a:spLocks noGrp="1"/>
+          </p:cNvSpPr>
+          <p:nvPr>
+            <p:ph type="title"/>
+          </p:nvPr>
+        </p:nvSpPr>
+        <p:spPr/>
+        <p:txBody>
+          <a:bodyPr/>
+          <a:lstStyle/>
+          <a:p>
+            <a:r>
+              <a:rPr lang="sr-Latn-RS" dirty="0"/>
+              <a:t>Test funkcije</a:t>
+            </a:r>
+            <a:endParaRPr lang="en-001" dirty="0"/>
+          </a:p>
+        </p:txBody>
+      </p:sp>
+      <mc:AlternateContent xmlns:mc="http://schemas.openxmlformats.org/markup-compatibility/2006">
+        <mc:Choice xmlns:a14="http://schemas.microsoft.com/office/drawing/2010/main" Requires="a14">
+          <p:sp>
+            <p:nvSpPr>
+              <p:cNvPr id="3" name="Content Placeholder 2">
+                <a:extLst>
+                  <a:ext uri="{FF2B5EF4-FFF2-40B4-BE49-F238E27FC236}">
+                    <a16:creationId xmlns:a16="http://schemas.microsoft.com/office/drawing/2014/main" id="{F817F4BB-FF39-7D2C-1D6B-42AFD6ECC0FB}"/>
+                  </a:ext>
+                </a:extLst>
+              </p:cNvPr>
+              <p:cNvSpPr>
+                <a:spLocks noGrp="1"/>
+              </p:cNvSpPr>
+              <p:nvPr>
+                <p:ph idx="1"/>
+              </p:nvPr>
+            </p:nvSpPr>
+            <p:spPr/>
+            <p:txBody>
+              <a:bodyPr/>
+              <a:lstStyle/>
+              <a:p>
+                <a:r>
+                  <a:rPr lang="sr-Latn-RS" dirty="0"/>
+                  <a:t>Korišćeno 10 funkcija, sa </a:t>
+                </a:r>
+                <a:r>
+                  <a:rPr lang="sr-Latn-RS" dirty="0" err="1"/>
+                  <a:t>osmodimenzionim</a:t>
+                </a:r>
+                <a:r>
+                  <a:rPr lang="sr-Latn-RS" dirty="0"/>
+                  <a:t> argumentima</a:t>
+                </a:r>
+              </a:p>
+              <a:p>
+                <a:r>
+                  <a:rPr lang="sr-Latn-RS" dirty="0"/>
+                  <a:t>Primer: Šekelova funkcija</a:t>
+                </a:r>
+              </a:p>
+              <a:p>
+                <a:pPr marL="0" indent="0">
+                  <a:buNone/>
+                </a:pPr>
+                <a14:m>
+                  <m:oMathPara xmlns:m="http://schemas.openxmlformats.org/officeDocument/2006/math">
+                    <m:oMathParaPr>
+                      <m:jc m:val="centerGroup"/>
+                    </m:oMathParaPr>
+                    <m:oMath xmlns:m="http://schemas.openxmlformats.org/officeDocument/2006/math">
+                      <m:r>
+                        <a:rPr lang="en-001" sz="2000" i="1"/>
+                        <m:t>𝑓</m:t>
+                      </m:r>
+                      <m:d>
+                        <m:dPr>
+                          <m:ctrlPr>
+                            <a:rPr lang="en-001" sz="2000" i="1"/>
+                          </m:ctrlPr>
+                        </m:dPr>
+                        <m:e>
+                          <m:r>
+                            <a:rPr lang="en-001" sz="2000" i="1"/>
+                            <m:t>𝑋</m:t>
+                          </m:r>
+                        </m:e>
+                      </m:d>
+                      <m:r>
+                        <a:rPr lang="en-001" sz="2000" i="1"/>
+                        <m:t>= </m:t>
+                      </m:r>
+                      <m:nary>
+                        <m:naryPr>
+                          <m:chr m:val="∑"/>
+                          <m:limLoc m:val="undOvr"/>
+                          <m:ctrlPr>
+                            <a:rPr lang="en-001" sz="2000" i="1"/>
+                          </m:ctrlPr>
+                        </m:naryPr>
+                        <m:sub>
+                          <m:r>
+                            <a:rPr lang="en-001" sz="2000" i="1"/>
+                            <m:t>𝑖</m:t>
+                          </m:r>
+                          <m:r>
+                            <a:rPr lang="en-001" sz="2000" i="1"/>
+                            <m:t>=1</m:t>
+                          </m:r>
+                        </m:sub>
+                        <m:sup>
+                          <m:r>
+                            <a:rPr lang="en-001" sz="2000" i="1"/>
+                            <m:t>𝑚</m:t>
+                          </m:r>
+                        </m:sup>
+                        <m:e>
+                          <m:sSup>
+                            <m:sSupPr>
+                              <m:ctrlPr>
+                                <a:rPr lang="en-001" sz="2000" i="1"/>
+                              </m:ctrlPr>
+                            </m:sSupPr>
+                            <m:e>
+                              <m:d>
+                                <m:dPr>
+                                  <m:ctrlPr>
+                                    <a:rPr lang="en-001" sz="2000" i="1"/>
+                                  </m:ctrlPr>
+                                </m:dPr>
+                                <m:e>
+                                  <m:sSub>
+                                    <m:sSubPr>
+                                      <m:ctrlPr>
+                                        <a:rPr lang="en-001" sz="2000" i="1"/>
+                                      </m:ctrlPr>
+                                    </m:sSubPr>
+                                    <m:e>
+                                      <m:r>
+                                        <a:rPr lang="en-001" sz="2000" i="1"/>
+                                        <m:t>𝑐</m:t>
+                                      </m:r>
+                                    </m:e>
+                                    <m:sub>
+                                      <m:r>
+                                        <a:rPr lang="en-001" sz="2000" i="1"/>
+                                        <m:t>𝑖</m:t>
+                                      </m:r>
+                                    </m:sub>
+                                  </m:sSub>
+                                  <m:r>
+                                    <a:rPr lang="en-001" sz="2000" i="1"/>
+                                    <m:t>+</m:t>
+                                  </m:r>
+                                  <m:nary>
+                                    <m:naryPr>
+                                      <m:chr m:val="∑"/>
+                                      <m:limLoc m:val="undOvr"/>
+                                      <m:ctrlPr>
+                                        <a:rPr lang="en-001" sz="2000" i="1"/>
+                                      </m:ctrlPr>
+                                    </m:naryPr>
+                                    <m:sub>
+                                      <m:r>
+                                        <a:rPr lang="en-001" sz="2000" i="1"/>
+                                        <m:t>𝑗</m:t>
+                                      </m:r>
+                                      <m:r>
+                                        <a:rPr lang="en-001" sz="2000" i="1"/>
+                                        <m:t>=1</m:t>
+                                      </m:r>
+                                    </m:sub>
+                                    <m:sup>
+                                      <m:r>
+                                        <a:rPr lang="en-001" sz="2000" i="1"/>
+                                        <m:t>𝑛</m:t>
+                                      </m:r>
+                                    </m:sup>
+                                    <m:e>
+                                      <m:sSup>
+                                        <m:sSupPr>
+                                          <m:ctrlPr>
+                                            <a:rPr lang="en-001" sz="2000" i="1"/>
+                                          </m:ctrlPr>
+                                        </m:sSupPr>
+                                        <m:e>
+                                          <m:d>
+                                            <m:dPr>
+                                              <m:ctrlPr>
+                                                <a:rPr lang="en-001" sz="2000" i="1"/>
+                                              </m:ctrlPr>
+                                            </m:dPr>
+                                            <m:e>
+                                              <m:sSub>
+                                                <m:sSubPr>
+                                                  <m:ctrlPr>
+                                                    <a:rPr lang="en-001" sz="2000" i="1"/>
+                                                  </m:ctrlPr>
+                                                </m:sSubPr>
+                                                <m:e>
+                                                  <m:r>
+                                                    <a:rPr lang="en-001" sz="2000" i="1"/>
+                                                    <m:t>𝑥</m:t>
+                                                  </m:r>
+                                                </m:e>
+                                                <m:sub>
+                                                  <m:r>
+                                                    <a:rPr lang="en-001" sz="2000" i="1"/>
+                                                    <m:t>𝑗</m:t>
+                                                  </m:r>
+                                                </m:sub>
+                                              </m:sSub>
+                                              <m:r>
+                                                <a:rPr lang="en-001" sz="2000" i="1"/>
+                                                <m:t>−</m:t>
+                                              </m:r>
+                                              <m:sSub>
+                                                <m:sSubPr>
+                                                  <m:ctrlPr>
+                                                    <a:rPr lang="en-001" sz="2000" i="1"/>
+                                                  </m:ctrlPr>
+                                                </m:sSubPr>
+                                                <m:e>
+                                                  <m:r>
+                                                    <a:rPr lang="en-001" sz="2000" i="1"/>
+                                                    <m:t>𝑎</m:t>
+                                                  </m:r>
+                                                </m:e>
+                                                <m:sub>
+                                                  <m:r>
+                                                    <a:rPr lang="en-001" sz="2000" i="1"/>
+                                                    <m:t>𝑗𝑖</m:t>
+                                                  </m:r>
+                                                </m:sub>
+                                              </m:sSub>
+                                            </m:e>
+                                          </m:d>
+                                        </m:e>
+                                        <m:sup>
+                                          <m:r>
+                                            <a:rPr lang="en-001" sz="2000" i="1"/>
+                                            <m:t>2</m:t>
+                                          </m:r>
+                                        </m:sup>
+                                      </m:sSup>
+                                    </m:e>
+                                  </m:nary>
+                                </m:e>
+                              </m:d>
+                            </m:e>
+                            <m:sup>
+                              <m:r>
+                                <a:rPr lang="en-001" sz="2000" i="1"/>
+                                <m:t>−1</m:t>
+                              </m:r>
+                            </m:sup>
+                          </m:sSup>
+                        </m:e>
+                      </m:nary>
+                      <m:r>
+                        <a:rPr lang="en-001" sz="2000" i="1"/>
+                        <m:t>, </m:t>
+                      </m:r>
+                      <m:r>
+                        <a:rPr lang="en-US" sz="2000" i="1"/>
+                        <m:t>−∞≤</m:t>
+                      </m:r>
+                      <m:sSub>
+                        <m:sSubPr>
+                          <m:ctrlPr>
+                            <a:rPr lang="en-001" sz="2000" i="1"/>
+                          </m:ctrlPr>
+                        </m:sSubPr>
+                        <m:e>
+                          <m:r>
+                            <a:rPr lang="en-US" sz="2000" i="1"/>
+                            <m:t>𝑥</m:t>
+                          </m:r>
+                        </m:e>
+                        <m:sub>
+                          <m:r>
+                            <a:rPr lang="en-US" sz="2000" i="1"/>
+                            <m:t>𝑖</m:t>
+                          </m:r>
+                        </m:sub>
+                      </m:sSub>
+                      <m:r>
+                        <a:rPr lang="en-US" sz="2000" i="1"/>
+                        <m:t>≤∞</m:t>
+                      </m:r>
+                    </m:oMath>
+                  </m:oMathPara>
+                </a14:m>
+                <a:endParaRPr lang="en-001" sz="2000" dirty="0"/>
+              </a:p>
+              <a:p>
+                <a:endParaRPr lang="sr-Latn-RS" dirty="0"/>
+              </a:p>
+            </p:txBody>
+          </p:sp>
+        </mc:Choice>
+        <mc:Fallback>
+          <p:sp>
+            <p:nvSpPr>
+              <p:cNvPr id="3" name="Content Placeholder 2">
+                <a:extLst>
+                  <a:ext uri="{FF2B5EF4-FFF2-40B4-BE49-F238E27FC236}">
+                    <a16:creationId xmlns:a16="http://schemas.microsoft.com/office/drawing/2014/main" id="{F817F4BB-FF39-7D2C-1D6B-42AFD6ECC0FB}"/>
+                  </a:ext>
+                </a:extLst>
+              </p:cNvPr>
+              <p:cNvSpPr>
+                <a:spLocks noGrp="1" noRot="1" noChangeAspect="1" noMove="1" noResize="1" noEditPoints="1" noAdjustHandles="1" noChangeArrowheads="1" noChangeShapeType="1" noTextEdit="1"/>
+              </p:cNvSpPr>
+              <p:nvPr>
+                <p:ph idx="1"/>
+              </p:nvPr>
+            </p:nvSpPr>
+            <p:spPr>
+              <a:blipFill>
+                <a:blip r:embed="rId2"/>
+                <a:stretch>
+                  <a:fillRect l="-1043" t="-2241"/>
+                </a:stretch>
+              </a:blipFill>
+            </p:spPr>
+            <p:txBody>
+              <a:bodyPr/>
+              <a:lstStyle/>
+              <a:p>
+                <a:r>
+                  <a:rPr lang="en-001">
+                    <a:noFill/>
+                  </a:rPr>
+                  <a:t> </a:t>
+                </a:r>
+              </a:p>
+            </p:txBody>
+          </p:sp>
+        </mc:Fallback>
+      </mc:AlternateContent>
+      <p:pic>
+        <p:nvPicPr>
+          <p:cNvPr id="5" name="Picture 4">
+            <a:extLst>
+              <a:ext uri="{FF2B5EF4-FFF2-40B4-BE49-F238E27FC236}">
+                <a16:creationId xmlns:a16="http://schemas.microsoft.com/office/drawing/2014/main" id="{77125C5A-92C4-0C37-EB9D-45347C2A74B8}"/>
+              </a:ext>
+            </a:extLst>
+          </p:cNvPr>
+          <p:cNvPicPr>
+            <a:picLocks noChangeAspect="1"/>
+          </p:cNvPicPr>
+          <p:nvPr/>
+        </p:nvPicPr>
+        <p:blipFill>
+          <a:blip r:embed="rId3">
+            <a:extLst>
+              <a:ext uri="{28A0092B-C50C-407E-A947-70E740481C1C}">
+                <a14:useLocalDpi xmlns:a14="http://schemas.microsoft.com/office/drawing/2010/main" val="0"/>
+              </a:ext>
+            </a:extLst>
+          </a:blip>
+          <a:stretch>
+            <a:fillRect/>
+          </a:stretch>
+        </p:blipFill>
+        <p:spPr>
+          <a:xfrm>
+            <a:off x="3512975" y="3740409"/>
+            <a:ext cx="4044821" cy="3033616"/>
+          </a:xfrm>
+          <a:prstGeom prst="rect">
+            <a:avLst/>
+          </a:prstGeom>
+        </p:spPr>
+      </p:pic>
+    </p:spTree>
+    <p:extLst>
+      <p:ext uri="{BB962C8B-B14F-4D97-AF65-F5344CB8AC3E}">
+        <p14:creationId xmlns:p14="http://schemas.microsoft.com/office/powerpoint/2010/main" val="918437303"/>
       </p:ext>
     </p:extLst>
   </p:cSld>
